--- a/docs/BypassFuzzer-Presentation.pptx
+++ b/docs/BypassFuzzer-Presentation.pptx
@@ -10,6 +10,10 @@
     <p:sldId id="258" r:id="rId9"/>
     <p:sldId id="259" r:id="rId10"/>
     <p:sldId id="260" r:id="rId11"/>
+    <p:sldId id="261" r:id="rId12"/>
+    <p:sldId id="262" r:id="rId13"/>
+    <p:sldId id="263" r:id="rId14"/>
+    <p:sldId id="264" r:id="rId15"/>
   </p:sldIdLst>
   <p:sldSz cx="12191695" cy="6858000" type="screen4x3"/>
   <p:notesSz cx="6858000" cy="9144000"/>
@@ -3447,7 +3451,7 @@
                 </a:solidFill>
                 <a:latin typeface="Inter"/>
               </a:rPr>
-              <a:t>Built on a decade of public research.</a:t>
+              <a:t>The research this tool automates.</a:t>
             </a:r>
           </a:p>
         </p:txBody>
@@ -3482,7 +3486,7 @@
                 </a:solidFill>
                 <a:latin typeface="Inter"/>
               </a:rPr>
-              <a:t>Path and URL parser bugs have been a drumbeat since 2018. Three talks/resources we lean on heavily:</a:t>
+              <a:t>Two talks from 2018 defined this bug class. Not much landmark research has landed since.</a:t>
             </a:r>
           </a:p>
         </p:txBody>
@@ -3495,7 +3499,7 @@
         </p:nvSpPr>
         <p:spPr>
           <a:xfrm>
-            <a:off x="685800" y="1874519"/>
+            <a:off x="685800" y="2194560"/>
             <a:ext cx="10789920" cy="1234440"/>
           </a:xfrm>
           <a:prstGeom prst="roundRect">
@@ -3541,7 +3545,7 @@
         </p:nvSpPr>
         <p:spPr>
           <a:xfrm>
-            <a:off x="685800" y="1874519"/>
+            <a:off x="685800" y="2194560"/>
             <a:ext cx="73152" cy="1234440"/>
           </a:xfrm>
           <a:prstGeom prst="rect">
@@ -3585,7 +3589,7 @@
         </p:nvSpPr>
         <p:spPr>
           <a:xfrm>
-            <a:off x="960120" y="1965959"/>
+            <a:off x="960120" y="2286000"/>
             <a:ext cx="10515600" cy="274320"/>
           </a:xfrm>
           <a:prstGeom prst="rect">
@@ -3620,7 +3624,7 @@
         </p:nvSpPr>
         <p:spPr>
           <a:xfrm>
-            <a:off x="960120" y="2194559"/>
+            <a:off x="960120" y="2514600"/>
             <a:ext cx="10515600" cy="411480"/>
           </a:xfrm>
           <a:prstGeom prst="rect">
@@ -3655,7 +3659,7 @@
         </p:nvSpPr>
         <p:spPr>
           <a:xfrm>
-            <a:off x="960120" y="2560319"/>
+            <a:off x="960120" y="2880360"/>
             <a:ext cx="10515600" cy="274320"/>
           </a:xfrm>
           <a:prstGeom prst="rect">
@@ -3690,7 +3694,7 @@
         </p:nvSpPr>
         <p:spPr>
           <a:xfrm>
-            <a:off x="960120" y="2807207"/>
+            <a:off x="960120" y="3127248"/>
             <a:ext cx="10515600" cy="274320"/>
           </a:xfrm>
           <a:prstGeom prst="rect">
@@ -3725,7 +3729,7 @@
         </p:nvSpPr>
         <p:spPr>
           <a:xfrm>
-            <a:off x="685800" y="3246120"/>
+            <a:off x="685800" y="3749039"/>
             <a:ext cx="10789920" cy="1234440"/>
           </a:xfrm>
           <a:prstGeom prst="roundRect">
@@ -3771,7 +3775,7 @@
         </p:nvSpPr>
         <p:spPr>
           <a:xfrm>
-            <a:off x="685800" y="3246120"/>
+            <a:off x="685800" y="3749039"/>
             <a:ext cx="73152" cy="1234440"/>
           </a:xfrm>
           <a:prstGeom prst="rect">
@@ -3815,7 +3819,7 @@
         </p:nvSpPr>
         <p:spPr>
           <a:xfrm>
-            <a:off x="960120" y="3337560"/>
+            <a:off x="960120" y="3840479"/>
             <a:ext cx="10515600" cy="274320"/>
           </a:xfrm>
           <a:prstGeom prst="rect">
@@ -3850,7 +3854,7 @@
         </p:nvSpPr>
         <p:spPr>
           <a:xfrm>
-            <a:off x="960120" y="3566160"/>
+            <a:off x="960120" y="4069079"/>
             <a:ext cx="10515600" cy="411480"/>
           </a:xfrm>
           <a:prstGeom prst="rect">
@@ -3885,7 +3889,7 @@
         </p:nvSpPr>
         <p:spPr>
           <a:xfrm>
-            <a:off x="960120" y="3931920"/>
+            <a:off x="960120" y="4434839"/>
             <a:ext cx="10515600" cy="274320"/>
           </a:xfrm>
           <a:prstGeom prst="rect">
@@ -3920,7 +3924,7 @@
         </p:nvSpPr>
         <p:spPr>
           <a:xfrm>
-            <a:off x="960120" y="4178808"/>
+            <a:off x="960120" y="4681727"/>
             <a:ext cx="10515600" cy="274320"/>
           </a:xfrm>
           <a:prstGeom prst="rect">
@@ -3949,104 +3953,14 @@
       </p:sp>
       <p:sp>
         <p:nvSpPr>
-          <p:cNvPr id="17" name="Rounded Rectangle 16"/>
-          <p:cNvSpPr/>
-          <p:nvPr/>
-        </p:nvSpPr>
-        <p:spPr>
-          <a:xfrm>
-            <a:off x="685800" y="4617720"/>
-            <a:ext cx="10789920" cy="1234440"/>
-          </a:xfrm>
-          <a:prstGeom prst="roundRect">
-            <a:avLst/>
-          </a:prstGeom>
-          <a:solidFill>
-            <a:srgbClr val="1B1F27"/>
-          </a:solidFill>
-          <a:ln w="9525">
-            <a:solidFill>
-              <a:srgbClr val="30353E"/>
-            </a:solidFill>
-          </a:ln>
-          <a:effectLst/>
-        </p:spPr>
-        <p:style>
-          <a:lnRef idx="1">
-            <a:schemeClr val="accent1"/>
-          </a:lnRef>
-          <a:fillRef idx="3">
-            <a:schemeClr val="accent1"/>
-          </a:fillRef>
-          <a:effectRef idx="2">
-            <a:schemeClr val="accent1"/>
-          </a:effectRef>
-          <a:fontRef idx="minor">
-            <a:schemeClr val="lt1"/>
-          </a:fontRef>
-        </p:style>
-        <p:txBody>
-          <a:bodyPr rtlCol="0" anchor="ctr"/>
-          <a:lstStyle/>
-          <a:p>
-            <a:pPr algn="ctr"/>
-          </a:p>
-        </p:txBody>
-      </p:sp>
-      <p:sp>
-        <p:nvSpPr>
-          <p:cNvPr id="18" name="Rectangle 17"/>
-          <p:cNvSpPr/>
-          <p:nvPr/>
-        </p:nvSpPr>
-        <p:spPr>
-          <a:xfrm>
-            <a:off x="685800" y="4617720"/>
-            <a:ext cx="73152" cy="1234440"/>
-          </a:xfrm>
-          <a:prstGeom prst="rect">
-            <a:avLst/>
-          </a:prstGeom>
-          <a:solidFill>
-            <a:srgbClr val="F4A81E"/>
-          </a:solidFill>
-          <a:ln>
-            <a:noFill/>
-          </a:ln>
-          <a:effectLst/>
-        </p:spPr>
-        <p:style>
-          <a:lnRef idx="1">
-            <a:schemeClr val="accent1"/>
-          </a:lnRef>
-          <a:fillRef idx="3">
-            <a:schemeClr val="accent1"/>
-          </a:fillRef>
-          <a:effectRef idx="2">
-            <a:schemeClr val="accent1"/>
-          </a:effectRef>
-          <a:fontRef idx="minor">
-            <a:schemeClr val="lt1"/>
-          </a:fontRef>
-        </p:style>
-        <p:txBody>
-          <a:bodyPr rtlCol="0" anchor="ctr"/>
-          <a:lstStyle/>
-          <a:p>
-            <a:pPr algn="ctr"/>
-          </a:p>
-        </p:txBody>
-      </p:sp>
-      <p:sp>
-        <p:nvSpPr>
-          <p:cNvPr id="19" name="TextBox 18"/>
+          <p:cNvPr id="17" name="TextBox 16"/>
           <p:cNvSpPr txBox="1"/>
           <p:nvPr/>
         </p:nvSpPr>
         <p:spPr>
           <a:xfrm>
-            <a:off x="960120" y="4709160"/>
-            <a:ext cx="10515600" cy="274320"/>
+            <a:off x="685800" y="5669280"/>
+            <a:ext cx="10789920" cy="365760"/>
           </a:xfrm>
           <a:prstGeom prst="rect">
             <a:avLst/>
@@ -4061,27 +3975,27 @@
           <a:p>
             <a:pPr algn="l"/>
             <a:r>
-              <a:rPr sz="1100" b="1">
-                <a:solidFill>
-                  <a:srgbClr val="F4A81E"/>
+              <a:rPr sz="1500" b="0">
+                <a:solidFill>
+                  <a:srgbClr val="E5E7EB"/>
                 </a:solidFill>
                 <a:latin typeface="Inter"/>
               </a:rPr>
-              <a:t>PORTSWIGGER RESEARCH  (ongoing)</a:t>
-            </a:r>
-          </a:p>
-        </p:txBody>
-      </p:sp>
-      <p:sp>
-        <p:nvSpPr>
-          <p:cNvPr id="20" name="TextBox 19"/>
+              <a:t>Two parallel 2018 publications. Since then: CVEs (Spring, Tomcat, Jetty, Next.js) and bounty writeups.</a:t>
+            </a:r>
+          </a:p>
+        </p:txBody>
+      </p:sp>
+      <p:sp>
+        <p:nvSpPr>
+          <p:cNvPr id="18" name="TextBox 17"/>
           <p:cNvSpPr txBox="1"/>
           <p:nvPr/>
         </p:nvSpPr>
         <p:spPr>
           <a:xfrm>
-            <a:off x="960120" y="4937760"/>
-            <a:ext cx="10515600" cy="411480"/>
+            <a:off x="685800" y="6080760"/>
+            <a:ext cx="10789920" cy="365760"/>
           </a:xfrm>
           <a:prstGeom prst="rect">
             <a:avLst/>
@@ -4096,125 +4010,20 @@
           <a:p>
             <a:pPr algn="l"/>
             <a:r>
-              <a:rPr sz="1800" b="1">
-                <a:solidFill>
-                  <a:srgbClr val="E5E7EB"/>
+              <a:rPr sz="1300" b="0">
+                <a:solidFill>
+                  <a:srgbClr val="9CA3AF"/>
                 </a:solidFill>
                 <a:latin typeface="Inter"/>
               </a:rPr>
-              <a:t>URL Validation Bypass Cheat Sheet</a:t>
-            </a:r>
-          </a:p>
-        </p:txBody>
-      </p:sp>
-      <p:sp>
-        <p:nvSpPr>
-          <p:cNvPr id="21" name="TextBox 20"/>
-          <p:cNvSpPr txBox="1"/>
-          <p:nvPr/>
-        </p:nvSpPr>
-        <p:spPr>
-          <a:xfrm>
-            <a:off x="960120" y="5303520"/>
-            <a:ext cx="10515600" cy="274320"/>
-          </a:xfrm>
-          <a:prstGeom prst="rect">
-            <a:avLst/>
-          </a:prstGeom>
-          <a:noFill/>
-        </p:spPr>
-        <p:txBody>
-          <a:bodyPr wrap="square" lIns="45720" rIns="45720" tIns="0" bIns="0">
-            <a:spAutoFit/>
-          </a:bodyPr>
-          <a:lstStyle/>
-          <a:p>
-            <a:pPr algn="l"/>
-            <a:r>
-              <a:rPr sz="1200" b="0">
-                <a:solidFill>
-                  <a:srgbClr val="9CA3AF"/>
-                </a:solidFill>
-                <a:latin typeface="Inter"/>
-              </a:rPr>
-              <a:t>PortSwigger  ·  open community PRs</a:t>
-            </a:r>
-          </a:p>
-        </p:txBody>
-      </p:sp>
-      <p:sp>
-        <p:nvSpPr>
-          <p:cNvPr id="22" name="TextBox 21"/>
-          <p:cNvSpPr txBox="1"/>
-          <p:nvPr/>
-        </p:nvSpPr>
-        <p:spPr>
-          <a:xfrm>
-            <a:off x="960120" y="5550408"/>
-            <a:ext cx="10515600" cy="274320"/>
-          </a:xfrm>
-          <a:prstGeom prst="rect">
-            <a:avLst/>
-          </a:prstGeom>
-          <a:noFill/>
-        </p:spPr>
-        <p:txBody>
-          <a:bodyPr wrap="square" lIns="45720" rIns="45720" tIns="0" bIns="0">
-            <a:spAutoFit/>
-          </a:bodyPr>
-          <a:lstStyle/>
-          <a:p>
-            <a:pPr algn="l"/>
-            <a:r>
-              <a:rPr sz="1000" b="0">
-                <a:solidFill>
-                  <a:srgbClr val="CBE7FF"/>
-                </a:solidFill>
-                <a:latin typeface="JetBrains Mono"/>
-              </a:rPr>
-              <a:t>portswigger.net/web-security/ssrf/url-validation-bypass-cheat-sheet</a:t>
-            </a:r>
-          </a:p>
-        </p:txBody>
-      </p:sp>
-      <p:sp>
-        <p:nvSpPr>
-          <p:cNvPr id="23" name="TextBox 22"/>
-          <p:cNvSpPr txBox="1"/>
-          <p:nvPr/>
-        </p:nvSpPr>
-        <p:spPr>
-          <a:xfrm>
-            <a:off x="685800" y="6126480"/>
-            <a:ext cx="10789920" cy="365760"/>
-          </a:xfrm>
-          <a:prstGeom prst="rect">
-            <a:avLst/>
-          </a:prstGeom>
-          <a:noFill/>
-        </p:spPr>
-        <p:txBody>
-          <a:bodyPr wrap="square" lIns="45720" rIns="45720" tIns="0" bIns="0">
-            <a:spAutoFit/>
-          </a:bodyPr>
-          <a:lstStyle/>
-          <a:p>
-            <a:pPr algn="l"/>
-            <a:r>
-              <a:rPr sz="1300" b="0">
-                <a:solidFill>
-                  <a:srgbClr val="9CA3AF"/>
-                </a:solidFill>
-                <a:latin typeface="Inter"/>
-              </a:rPr>
-              <a:t>Plus PoCs and CVE write-ups from Bentkowski, Kettle, Wallarm, and many more.</a:t>
-            </a:r>
-          </a:p>
-        </p:txBody>
-      </p:sp>
-      <p:sp>
-        <p:nvSpPr>
-          <p:cNvPr id="24" name="Rectangle 23"/>
+              <a:t>The tool folds in their taxonomy, the CVEs since, and folk techniques (overlong UTF-8, tab-splitter, sacrificial prefix).</a:t>
+            </a:r>
+          </a:p>
+        </p:txBody>
+      </p:sp>
+      <p:sp>
+        <p:nvSpPr>
+          <p:cNvPr id="19" name="Rectangle 18"/>
           <p:cNvSpPr/>
           <p:nvPr/>
         </p:nvSpPr>
@@ -4523,7 +4332,7 @@
                 </a:solidFill>
                 <a:latin typeface="JetBrains Mono"/>
               </a:rPr>
-              <a:t>    return 403;</a:t>
+              <a:t>}</a:t>
             </a:r>
           </a:p>
           <a:p>
@@ -4535,7 +4344,7 @@
                 </a:solidFill>
                 <a:latin typeface="JetBrains Mono"/>
               </a:rPr>
-              <a:t>}</a:t>
+              <a:t/>
             </a:r>
           </a:p>
         </p:txBody>
@@ -5937,7 +5746,7 @@
                 </a:solidFill>
                 <a:latin typeface="JetBrains Mono"/>
               </a:rPr>
-              <a:t>../  ..;/  ..%2f  /./  sacrificial-prefix  matrix-param  ..\  //</a:t>
+              <a:t>../  ..;/  ..%2f  /./  /x/../  /users;foo=bar/profile  ..\  //</a:t>
             </a:r>
           </a:p>
         </p:txBody>
@@ -6306,6 +6115,2524 @@
       <p:sp>
         <p:nvSpPr>
           <p:cNvPr id="19" name="Rectangle 18"/>
+          <p:cNvSpPr/>
+          <p:nvPr/>
+        </p:nvSpPr>
+        <p:spPr>
+          <a:xfrm>
+            <a:off x="457200" y="6263640"/>
+            <a:ext cx="365760" cy="36576"/>
+          </a:xfrm>
+          <a:prstGeom prst="rect">
+            <a:avLst/>
+          </a:prstGeom>
+          <a:solidFill>
+            <a:srgbClr val="F4A81E"/>
+          </a:solidFill>
+          <a:ln>
+            <a:noFill/>
+          </a:ln>
+          <a:effectLst/>
+        </p:spPr>
+        <p:style>
+          <a:lnRef idx="1">
+            <a:schemeClr val="accent1"/>
+          </a:lnRef>
+          <a:fillRef idx="3">
+            <a:schemeClr val="accent1"/>
+          </a:fillRef>
+          <a:effectRef idx="2">
+            <a:schemeClr val="accent1"/>
+          </a:effectRef>
+          <a:fontRef idx="minor">
+            <a:schemeClr val="lt1"/>
+          </a:fontRef>
+        </p:style>
+        <p:txBody>
+          <a:bodyPr rtlCol="0" anchor="ctr"/>
+          <a:lstStyle/>
+          <a:p>
+            <a:pPr algn="ctr"/>
+          </a:p>
+        </p:txBody>
+      </p:sp>
+    </p:spTree>
+  </p:cSld>
+  <p:clrMapOvr>
+    <a:masterClrMapping/>
+  </p:clrMapOvr>
+</p:sld>
+</file>
+
+<file path=ppt/slides/slide6.xml><?xml version="1.0" encoding="utf-8"?>
+<p:sld xmlns:a="http://schemas.openxmlformats.org/drawingml/2006/main" xmlns:p="http://schemas.openxmlformats.org/presentationml/2006/main" xmlns:r="http://schemas.openxmlformats.org/officeDocument/2006/relationships">
+  <p:cSld>
+    <p:spTree>
+      <p:nvGrpSpPr>
+        <p:cNvPr id="1" name=""/>
+        <p:cNvGrpSpPr/>
+        <p:nvPr/>
+      </p:nvGrpSpPr>
+      <p:grpSpPr/>
+      <p:sp>
+        <p:nvSpPr>
+          <p:cNvPr id="2" name="Rectangle 1"/>
+          <p:cNvSpPr/>
+          <p:nvPr/>
+        </p:nvSpPr>
+        <p:spPr>
+          <a:xfrm>
+            <a:off x="0" y="0"/>
+            <a:ext cx="12191695" cy="6858000"/>
+          </a:xfrm>
+          <a:prstGeom prst="rect">
+            <a:avLst/>
+          </a:prstGeom>
+          <a:solidFill>
+            <a:srgbClr val="101218"/>
+          </a:solidFill>
+          <a:ln>
+            <a:noFill/>
+          </a:ln>
+          <a:effectLst/>
+        </p:spPr>
+        <p:style>
+          <a:lnRef idx="1">
+            <a:schemeClr val="accent1"/>
+          </a:lnRef>
+          <a:fillRef idx="3">
+            <a:schemeClr val="accent1"/>
+          </a:fillRef>
+          <a:effectRef idx="2">
+            <a:schemeClr val="accent1"/>
+          </a:effectRef>
+          <a:fontRef idx="minor">
+            <a:schemeClr val="lt1"/>
+          </a:fontRef>
+        </p:style>
+        <p:txBody>
+          <a:bodyPr rtlCol="0" anchor="ctr"/>
+          <a:lstStyle/>
+          <a:p>
+            <a:pPr algn="ctr"/>
+          </a:p>
+        </p:txBody>
+      </p:sp>
+      <p:sp>
+        <p:nvSpPr>
+          <p:cNvPr id="3" name="TextBox 2"/>
+          <p:cNvSpPr txBox="1"/>
+          <p:nvPr/>
+        </p:nvSpPr>
+        <p:spPr>
+          <a:xfrm>
+            <a:off x="685800" y="502920"/>
+            <a:ext cx="10789920" cy="640080"/>
+          </a:xfrm>
+          <a:prstGeom prst="rect">
+            <a:avLst/>
+          </a:prstGeom>
+          <a:noFill/>
+        </p:spPr>
+        <p:txBody>
+          <a:bodyPr wrap="square" lIns="45720" rIns="45720" tIns="0" bIns="0">
+            <a:spAutoFit/>
+          </a:bodyPr>
+          <a:lstStyle/>
+          <a:p>
+            <a:pPr algn="l"/>
+            <a:r>
+              <a:rPr sz="3600" b="1">
+                <a:solidFill>
+                  <a:srgbClr val="E5E7EB"/>
+                </a:solidFill>
+                <a:latin typeface="Inter"/>
+              </a:rPr>
+              <a:t>Seen in the wild.</a:t>
+            </a:r>
+          </a:p>
+        </p:txBody>
+      </p:sp>
+      <p:sp>
+        <p:nvSpPr>
+          <p:cNvPr id="4" name="TextBox 3"/>
+          <p:cNvSpPr txBox="1"/>
+          <p:nvPr/>
+        </p:nvSpPr>
+        <p:spPr>
+          <a:xfrm>
+            <a:off x="685800" y="1143000"/>
+            <a:ext cx="10789920" cy="457200"/>
+          </a:xfrm>
+          <a:prstGeom prst="rect">
+            <a:avLst/>
+          </a:prstGeom>
+          <a:noFill/>
+        </p:spPr>
+        <p:txBody>
+          <a:bodyPr wrap="square" lIns="45720" rIns="45720" tIns="0" bIns="0">
+            <a:spAutoFit/>
+          </a:bodyPr>
+          <a:lstStyle/>
+          <a:p>
+            <a:pPr algn="l"/>
+            <a:r>
+              <a:rPr sz="1600" b="0">
+                <a:solidFill>
+                  <a:srgbClr val="9CA3AF"/>
+                </a:solidFill>
+                <a:latin typeface="Inter"/>
+              </a:rPr>
+              <a:t>An engagement target's user-registration API. Unauth user hitting the admin endpoint. Expected 403.</a:t>
+            </a:r>
+          </a:p>
+        </p:txBody>
+      </p:sp>
+      <p:sp>
+        <p:nvSpPr>
+          <p:cNvPr id="5" name="TextBox 4"/>
+          <p:cNvSpPr txBox="1"/>
+          <p:nvPr/>
+        </p:nvSpPr>
+        <p:spPr>
+          <a:xfrm>
+            <a:off x="685800" y="1874519"/>
+            <a:ext cx="10789920" cy="365760"/>
+          </a:xfrm>
+          <a:prstGeom prst="rect">
+            <a:avLst/>
+          </a:prstGeom>
+          <a:noFill/>
+        </p:spPr>
+        <p:txBody>
+          <a:bodyPr wrap="square" lIns="45720" rIns="45720" tIns="0" bIns="0">
+            <a:spAutoFit/>
+          </a:bodyPr>
+          <a:lstStyle/>
+          <a:p>
+            <a:pPr algn="l"/>
+            <a:r>
+              <a:rPr sz="1300" b="1">
+                <a:solidFill>
+                  <a:srgbClr val="F4A81E"/>
+                </a:solidFill>
+                <a:latin typeface="Inter"/>
+              </a:rPr>
+              <a:t>Request</a:t>
+            </a:r>
+          </a:p>
+        </p:txBody>
+      </p:sp>
+      <p:sp>
+        <p:nvSpPr>
+          <p:cNvPr id="6" name="Rounded Rectangle 5"/>
+          <p:cNvSpPr/>
+          <p:nvPr/>
+        </p:nvSpPr>
+        <p:spPr>
+          <a:xfrm>
+            <a:off x="685800" y="2240280"/>
+            <a:ext cx="10789920" cy="2606040"/>
+          </a:xfrm>
+          <a:prstGeom prst="roundRect">
+            <a:avLst/>
+          </a:prstGeom>
+          <a:solidFill>
+            <a:srgbClr val="1B1F27"/>
+          </a:solidFill>
+          <a:ln w="9525">
+            <a:solidFill>
+              <a:srgbClr val="30353E"/>
+            </a:solidFill>
+          </a:ln>
+          <a:effectLst/>
+        </p:spPr>
+        <p:style>
+          <a:lnRef idx="1">
+            <a:schemeClr val="accent1"/>
+          </a:lnRef>
+          <a:fillRef idx="3">
+            <a:schemeClr val="accent1"/>
+          </a:fillRef>
+          <a:effectRef idx="2">
+            <a:schemeClr val="accent1"/>
+          </a:effectRef>
+          <a:fontRef idx="minor">
+            <a:schemeClr val="lt1"/>
+          </a:fontRef>
+        </p:style>
+        <p:txBody>
+          <a:bodyPr rtlCol="0" anchor="ctr"/>
+          <a:lstStyle/>
+          <a:p>
+            <a:pPr algn="ctr"/>
+          </a:p>
+        </p:txBody>
+      </p:sp>
+      <p:sp>
+        <p:nvSpPr>
+          <p:cNvPr id="7" name="TextBox 6"/>
+          <p:cNvSpPr txBox="1"/>
+          <p:nvPr/>
+        </p:nvSpPr>
+        <p:spPr>
+          <a:xfrm>
+            <a:off x="914400" y="2423160"/>
+            <a:ext cx="10332720" cy="2240280"/>
+          </a:xfrm>
+          <a:prstGeom prst="rect">
+            <a:avLst/>
+          </a:prstGeom>
+          <a:noFill/>
+        </p:spPr>
+        <p:txBody>
+          <a:bodyPr wrap="square" lIns="0" rIns="0" tIns="0" bIns="0">
+            <a:spAutoFit/>
+          </a:bodyPr>
+          <a:lstStyle/>
+          <a:p>
+            <a:pPr algn="l"/>
+            <a:r>
+              <a:rPr sz="1400">
+                <a:solidFill>
+                  <a:srgbClr val="CBE7FF"/>
+                </a:solidFill>
+                <a:latin typeface="JetBrains Mono"/>
+              </a:rPr>
+              <a:t>POST /api/v1/users HTTP/2</a:t>
+            </a:r>
+          </a:p>
+          <a:p>
+            <a:pPr algn="l"/>
+            <a:r>
+              <a:rPr sz="1400">
+                <a:solidFill>
+                  <a:srgbClr val="CBE7FF"/>
+                </a:solidFill>
+                <a:latin typeface="JetBrains Mono"/>
+              </a:rPr>
+              <a:t>Content-Type: application/json</a:t>
+            </a:r>
+          </a:p>
+          <a:p>
+            <a:pPr algn="l"/>
+            <a:r>
+              <a:rPr sz="1400">
+                <a:solidFill>
+                  <a:srgbClr val="CBE7FF"/>
+                </a:solidFill>
+                <a:latin typeface="JetBrains Mono"/>
+              </a:rPr>
+              <a:t/>
+            </a:r>
+          </a:p>
+          <a:p>
+            <a:pPr algn="l"/>
+            <a:r>
+              <a:rPr sz="1400">
+                <a:solidFill>
+                  <a:srgbClr val="CBE7FF"/>
+                </a:solidFill>
+                <a:latin typeface="JetBrains Mono"/>
+              </a:rPr>
+              <a:t>{</a:t>
+            </a:r>
+          </a:p>
+          <a:p>
+            <a:pPr algn="l"/>
+            <a:r>
+              <a:rPr sz="1400">
+                <a:solidFill>
+                  <a:srgbClr val="CBE7FF"/>
+                </a:solidFill>
+                <a:latin typeface="JetBrains Mono"/>
+              </a:rPr>
+              <a:t>  "email": "jconesa@...net-spi.com",</a:t>
+            </a:r>
+          </a:p>
+          <a:p>
+            <a:pPr algn="l"/>
+            <a:r>
+              <a:rPr sz="1400">
+                <a:solidFill>
+                  <a:srgbClr val="CBE7FF"/>
+                </a:solidFill>
+                <a:latin typeface="JetBrains Mono"/>
+              </a:rPr>
+              <a:t>  "userName": "jconesa",</a:t>
+            </a:r>
+          </a:p>
+          <a:p>
+            <a:pPr algn="l"/>
+            <a:r>
+              <a:rPr sz="1400">
+                <a:solidFill>
+                  <a:srgbClr val="CBE7FF"/>
+                </a:solidFill>
+                <a:latin typeface="JetBrains Mono"/>
+              </a:rPr>
+              <a:t>  "roleId": "60183e185dacfc6814829ac7",</a:t>
+            </a:r>
+          </a:p>
+          <a:p>
+            <a:pPr algn="l"/>
+            <a:r>
+              <a:rPr sz="1400">
+                <a:solidFill>
+                  <a:srgbClr val="CBE7FF"/>
+                </a:solidFill>
+                <a:latin typeface="JetBrains Mono"/>
+              </a:rPr>
+              <a:t>  "groups": [], "preferences": { "localeId": "en-US" }</a:t>
+            </a:r>
+          </a:p>
+          <a:p>
+            <a:pPr algn="l"/>
+            <a:r>
+              <a:rPr sz="1400">
+                <a:solidFill>
+                  <a:srgbClr val="CBE7FF"/>
+                </a:solidFill>
+                <a:latin typeface="JetBrains Mono"/>
+              </a:rPr>
+              <a:t>}</a:t>
+            </a:r>
+          </a:p>
+        </p:txBody>
+      </p:sp>
+      <p:sp>
+        <p:nvSpPr>
+          <p:cNvPr id="8" name="TextBox 7"/>
+          <p:cNvSpPr txBox="1"/>
+          <p:nvPr/>
+        </p:nvSpPr>
+        <p:spPr>
+          <a:xfrm>
+            <a:off x="685800" y="5029200"/>
+            <a:ext cx="10789920" cy="365760"/>
+          </a:xfrm>
+          <a:prstGeom prst="rect">
+            <a:avLst/>
+          </a:prstGeom>
+          <a:noFill/>
+        </p:spPr>
+        <p:txBody>
+          <a:bodyPr wrap="square" lIns="45720" rIns="45720" tIns="0" bIns="0">
+            <a:spAutoFit/>
+          </a:bodyPr>
+          <a:lstStyle/>
+          <a:p>
+            <a:pPr algn="l"/>
+            <a:r>
+              <a:rPr sz="1300" b="1">
+                <a:solidFill>
+                  <a:srgbClr val="F4A81E"/>
+                </a:solidFill>
+                <a:latin typeface="Inter"/>
+              </a:rPr>
+              <a:t>Response</a:t>
+            </a:r>
+          </a:p>
+        </p:txBody>
+      </p:sp>
+      <p:sp>
+        <p:nvSpPr>
+          <p:cNvPr id="9" name="Rounded Rectangle 8"/>
+          <p:cNvSpPr/>
+          <p:nvPr/>
+        </p:nvSpPr>
+        <p:spPr>
+          <a:xfrm>
+            <a:off x="685800" y="5394960"/>
+            <a:ext cx="10789920" cy="914400"/>
+          </a:xfrm>
+          <a:prstGeom prst="roundRect">
+            <a:avLst/>
+          </a:prstGeom>
+          <a:solidFill>
+            <a:srgbClr val="1B1F27"/>
+          </a:solidFill>
+          <a:ln w="9525">
+            <a:solidFill>
+              <a:srgbClr val="30353E"/>
+            </a:solidFill>
+          </a:ln>
+          <a:effectLst/>
+        </p:spPr>
+        <p:style>
+          <a:lnRef idx="1">
+            <a:schemeClr val="accent1"/>
+          </a:lnRef>
+          <a:fillRef idx="3">
+            <a:schemeClr val="accent1"/>
+          </a:fillRef>
+          <a:effectRef idx="2">
+            <a:schemeClr val="accent1"/>
+          </a:effectRef>
+          <a:fontRef idx="minor">
+            <a:schemeClr val="lt1"/>
+          </a:fontRef>
+        </p:style>
+        <p:txBody>
+          <a:bodyPr rtlCol="0" anchor="ctr"/>
+          <a:lstStyle/>
+          <a:p>
+            <a:pPr algn="ctr"/>
+          </a:p>
+        </p:txBody>
+      </p:sp>
+      <p:sp>
+        <p:nvSpPr>
+          <p:cNvPr id="10" name="TextBox 9"/>
+          <p:cNvSpPr txBox="1"/>
+          <p:nvPr/>
+        </p:nvSpPr>
+        <p:spPr>
+          <a:xfrm>
+            <a:off x="914400" y="5577840"/>
+            <a:ext cx="10332720" cy="548640"/>
+          </a:xfrm>
+          <a:prstGeom prst="rect">
+            <a:avLst/>
+          </a:prstGeom>
+          <a:noFill/>
+        </p:spPr>
+        <p:txBody>
+          <a:bodyPr wrap="square" lIns="0" rIns="0" tIns="0" bIns="0">
+            <a:spAutoFit/>
+          </a:bodyPr>
+          <a:lstStyle/>
+          <a:p>
+            <a:pPr algn="l"/>
+            <a:r>
+              <a:rPr sz="1400">
+                <a:solidFill>
+                  <a:srgbClr val="F47171"/>
+                </a:solidFill>
+                <a:latin typeface="JetBrains Mono"/>
+              </a:rPr>
+              <a:t>HTTP/2 403 Forbidden</a:t>
+            </a:r>
+          </a:p>
+          <a:p>
+            <a:pPr algn="l"/>
+            <a:r>
+              <a:rPr sz="1400">
+                <a:solidFill>
+                  <a:srgbClr val="CBE7FF"/>
+                </a:solidFill>
+                <a:latin typeface="JetBrains Mono"/>
+              </a:rPr>
+              <a:t/>
+            </a:r>
+          </a:p>
+          <a:p>
+            <a:pPr algn="l"/>
+            <a:r>
+              <a:rPr sz="1400">
+                <a:solidFill>
+                  <a:srgbClr val="CBE7FF"/>
+                </a:solidFill>
+                <a:latin typeface="JetBrains Mono"/>
+              </a:rPr>
+              <a:t>{"error":{"code":101,"message":"Access denied","status":403}}</a:t>
+            </a:r>
+          </a:p>
+        </p:txBody>
+      </p:sp>
+      <p:sp>
+        <p:nvSpPr>
+          <p:cNvPr id="11" name="Rectangle 10"/>
+          <p:cNvSpPr/>
+          <p:nvPr/>
+        </p:nvSpPr>
+        <p:spPr>
+          <a:xfrm>
+            <a:off x="457200" y="6263640"/>
+            <a:ext cx="365760" cy="36576"/>
+          </a:xfrm>
+          <a:prstGeom prst="rect">
+            <a:avLst/>
+          </a:prstGeom>
+          <a:solidFill>
+            <a:srgbClr val="F4A81E"/>
+          </a:solidFill>
+          <a:ln>
+            <a:noFill/>
+          </a:ln>
+          <a:effectLst/>
+        </p:spPr>
+        <p:style>
+          <a:lnRef idx="1">
+            <a:schemeClr val="accent1"/>
+          </a:lnRef>
+          <a:fillRef idx="3">
+            <a:schemeClr val="accent1"/>
+          </a:fillRef>
+          <a:effectRef idx="2">
+            <a:schemeClr val="accent1"/>
+          </a:effectRef>
+          <a:fontRef idx="minor">
+            <a:schemeClr val="lt1"/>
+          </a:fontRef>
+        </p:style>
+        <p:txBody>
+          <a:bodyPr rtlCol="0" anchor="ctr"/>
+          <a:lstStyle/>
+          <a:p>
+            <a:pPr algn="ctr"/>
+          </a:p>
+        </p:txBody>
+      </p:sp>
+    </p:spTree>
+  </p:cSld>
+  <p:clrMapOvr>
+    <a:masterClrMapping/>
+  </p:clrMapOvr>
+</p:sld>
+</file>
+
+<file path=ppt/slides/slide7.xml><?xml version="1.0" encoding="utf-8"?>
+<p:sld xmlns:a="http://schemas.openxmlformats.org/drawingml/2006/main" xmlns:p="http://schemas.openxmlformats.org/presentationml/2006/main" xmlns:r="http://schemas.openxmlformats.org/officeDocument/2006/relationships">
+  <p:cSld>
+    <p:spTree>
+      <p:nvGrpSpPr>
+        <p:cNvPr id="1" name=""/>
+        <p:cNvGrpSpPr/>
+        <p:nvPr/>
+      </p:nvGrpSpPr>
+      <p:grpSpPr/>
+      <p:sp>
+        <p:nvSpPr>
+          <p:cNvPr id="2" name="Rectangle 1"/>
+          <p:cNvSpPr/>
+          <p:nvPr/>
+        </p:nvSpPr>
+        <p:spPr>
+          <a:xfrm>
+            <a:off x="0" y="0"/>
+            <a:ext cx="12191695" cy="6858000"/>
+          </a:xfrm>
+          <a:prstGeom prst="rect">
+            <a:avLst/>
+          </a:prstGeom>
+          <a:solidFill>
+            <a:srgbClr val="101218"/>
+          </a:solidFill>
+          <a:ln>
+            <a:noFill/>
+          </a:ln>
+          <a:effectLst/>
+        </p:spPr>
+        <p:style>
+          <a:lnRef idx="1">
+            <a:schemeClr val="accent1"/>
+          </a:lnRef>
+          <a:fillRef idx="3">
+            <a:schemeClr val="accent1"/>
+          </a:fillRef>
+          <a:effectRef idx="2">
+            <a:schemeClr val="accent1"/>
+          </a:effectRef>
+          <a:fontRef idx="minor">
+            <a:schemeClr val="lt1"/>
+          </a:fontRef>
+        </p:style>
+        <p:txBody>
+          <a:bodyPr rtlCol="0" anchor="ctr"/>
+          <a:lstStyle/>
+          <a:p>
+            <a:pPr algn="ctr"/>
+          </a:p>
+        </p:txBody>
+      </p:sp>
+      <p:sp>
+        <p:nvSpPr>
+          <p:cNvPr id="3" name="TextBox 2"/>
+          <p:cNvSpPr txBox="1"/>
+          <p:nvPr/>
+        </p:nvSpPr>
+        <p:spPr>
+          <a:xfrm>
+            <a:off x="685800" y="502920"/>
+            <a:ext cx="10789920" cy="640080"/>
+          </a:xfrm>
+          <a:prstGeom prst="rect">
+            <a:avLst/>
+          </a:prstGeom>
+          <a:noFill/>
+        </p:spPr>
+        <p:txBody>
+          <a:bodyPr wrap="square" lIns="45720" rIns="45720" tIns="0" bIns="0">
+            <a:spAutoFit/>
+          </a:bodyPr>
+          <a:lstStyle/>
+          <a:p>
+            <a:pPr algn="l"/>
+            <a:r>
+              <a:rPr sz="3600" b="1">
+                <a:solidFill>
+                  <a:srgbClr val="E5E7EB"/>
+                </a:solidFill>
+                <a:latin typeface="Inter"/>
+              </a:rPr>
+              <a:t>Three slashes later.</a:t>
+            </a:r>
+          </a:p>
+        </p:txBody>
+      </p:sp>
+      <p:sp>
+        <p:nvSpPr>
+          <p:cNvPr id="4" name="TextBox 3"/>
+          <p:cNvSpPr txBox="1"/>
+          <p:nvPr/>
+        </p:nvSpPr>
+        <p:spPr>
+          <a:xfrm>
+            <a:off x="685800" y="1143000"/>
+            <a:ext cx="10789920" cy="457200"/>
+          </a:xfrm>
+          <a:prstGeom prst="rect">
+            <a:avLst/>
+          </a:prstGeom>
+          <a:noFill/>
+        </p:spPr>
+        <p:txBody>
+          <a:bodyPr wrap="square" lIns="45720" rIns="45720" tIns="0" bIns="0">
+            <a:spAutoFit/>
+          </a:bodyPr>
+          <a:lstStyle/>
+          <a:p>
+            <a:pPr algn="l"/>
+            <a:r>
+              <a:rPr sz="1600" b="0">
+                <a:solidFill>
+                  <a:srgbClr val="9CA3AF"/>
+                </a:solidFill>
+                <a:latin typeface="Inter"/>
+              </a:rPr>
+              <a:t>Same body. Same headers. One path mutation.</a:t>
+            </a:r>
+          </a:p>
+        </p:txBody>
+      </p:sp>
+      <p:sp>
+        <p:nvSpPr>
+          <p:cNvPr id="5" name="TextBox 4"/>
+          <p:cNvSpPr txBox="1"/>
+          <p:nvPr/>
+        </p:nvSpPr>
+        <p:spPr>
+          <a:xfrm>
+            <a:off x="685800" y="1874519"/>
+            <a:ext cx="10789920" cy="365760"/>
+          </a:xfrm>
+          <a:prstGeom prst="rect">
+            <a:avLst/>
+          </a:prstGeom>
+          <a:noFill/>
+        </p:spPr>
+        <p:txBody>
+          <a:bodyPr wrap="square" lIns="45720" rIns="45720" tIns="0" bIns="0">
+            <a:spAutoFit/>
+          </a:bodyPr>
+          <a:lstStyle/>
+          <a:p>
+            <a:pPr algn="l"/>
+            <a:r>
+              <a:rPr sz="1300" b="1">
+                <a:solidFill>
+                  <a:srgbClr val="F4A81E"/>
+                </a:solidFill>
+                <a:latin typeface="Inter"/>
+              </a:rPr>
+              <a:t>Request</a:t>
+            </a:r>
+          </a:p>
+        </p:txBody>
+      </p:sp>
+      <p:sp>
+        <p:nvSpPr>
+          <p:cNvPr id="6" name="Rounded Rectangle 5"/>
+          <p:cNvSpPr/>
+          <p:nvPr/>
+        </p:nvSpPr>
+        <p:spPr>
+          <a:xfrm>
+            <a:off x="685800" y="2240280"/>
+            <a:ext cx="10789920" cy="2606040"/>
+          </a:xfrm>
+          <a:prstGeom prst="roundRect">
+            <a:avLst/>
+          </a:prstGeom>
+          <a:solidFill>
+            <a:srgbClr val="1B1F27"/>
+          </a:solidFill>
+          <a:ln w="9525">
+            <a:solidFill>
+              <a:srgbClr val="30353E"/>
+            </a:solidFill>
+          </a:ln>
+          <a:effectLst/>
+        </p:spPr>
+        <p:style>
+          <a:lnRef idx="1">
+            <a:schemeClr val="accent1"/>
+          </a:lnRef>
+          <a:fillRef idx="3">
+            <a:schemeClr val="accent1"/>
+          </a:fillRef>
+          <a:effectRef idx="2">
+            <a:schemeClr val="accent1"/>
+          </a:effectRef>
+          <a:fontRef idx="minor">
+            <a:schemeClr val="lt1"/>
+          </a:fontRef>
+        </p:style>
+        <p:txBody>
+          <a:bodyPr rtlCol="0" anchor="ctr"/>
+          <a:lstStyle/>
+          <a:p>
+            <a:pPr algn="ctr"/>
+          </a:p>
+        </p:txBody>
+      </p:sp>
+      <p:sp>
+        <p:nvSpPr>
+          <p:cNvPr id="7" name="TextBox 6"/>
+          <p:cNvSpPr txBox="1"/>
+          <p:nvPr/>
+        </p:nvSpPr>
+        <p:spPr>
+          <a:xfrm>
+            <a:off x="914400" y="2423160"/>
+            <a:ext cx="10332720" cy="2240280"/>
+          </a:xfrm>
+          <a:prstGeom prst="rect">
+            <a:avLst/>
+          </a:prstGeom>
+          <a:noFill/>
+        </p:spPr>
+        <p:txBody>
+          <a:bodyPr wrap="square" lIns="0" rIns="0" tIns="0" bIns="0">
+            <a:spAutoFit/>
+          </a:bodyPr>
+          <a:lstStyle/>
+          <a:p>
+            <a:pPr algn="l"/>
+            <a:r>
+              <a:rPr sz="1400">
+                <a:solidFill>
+                  <a:srgbClr val="4ADE80"/>
+                </a:solidFill>
+                <a:latin typeface="JetBrains Mono"/>
+              </a:rPr>
+              <a:t>POST /api///v1/users HTTP/2      ← note the /// between api and v1</a:t>
+            </a:r>
+          </a:p>
+          <a:p>
+            <a:pPr algn="l"/>
+            <a:r>
+              <a:rPr sz="1400">
+                <a:solidFill>
+                  <a:srgbClr val="CBE7FF"/>
+                </a:solidFill>
+                <a:latin typeface="JetBrains Mono"/>
+              </a:rPr>
+              <a:t>Content-Type: application/json</a:t>
+            </a:r>
+          </a:p>
+          <a:p>
+            <a:pPr algn="l"/>
+            <a:r>
+              <a:rPr sz="1400">
+                <a:solidFill>
+                  <a:srgbClr val="CBE7FF"/>
+                </a:solidFill>
+                <a:latin typeface="JetBrains Mono"/>
+              </a:rPr>
+              <a:t/>
+            </a:r>
+          </a:p>
+          <a:p>
+            <a:pPr algn="l"/>
+            <a:r>
+              <a:rPr sz="1400">
+                <a:solidFill>
+                  <a:srgbClr val="CBE7FF"/>
+                </a:solidFill>
+                <a:latin typeface="JetBrains Mono"/>
+              </a:rPr>
+              <a:t>{</a:t>
+            </a:r>
+          </a:p>
+          <a:p>
+            <a:pPr algn="l"/>
+            <a:r>
+              <a:rPr sz="1400">
+                <a:solidFill>
+                  <a:srgbClr val="CBE7FF"/>
+                </a:solidFill>
+                <a:latin typeface="JetBrains Mono"/>
+              </a:rPr>
+              <a:t>  "email": "jconesa@...net-spi.com",</a:t>
+            </a:r>
+          </a:p>
+          <a:p>
+            <a:pPr algn="l"/>
+            <a:r>
+              <a:rPr sz="1400">
+                <a:solidFill>
+                  <a:srgbClr val="CBE7FF"/>
+                </a:solidFill>
+                <a:latin typeface="JetBrains Mono"/>
+              </a:rPr>
+              <a:t>  "userName": "jconesa",</a:t>
+            </a:r>
+          </a:p>
+          <a:p>
+            <a:pPr algn="l"/>
+            <a:r>
+              <a:rPr sz="1400">
+                <a:solidFill>
+                  <a:srgbClr val="CBE7FF"/>
+                </a:solidFill>
+                <a:latin typeface="JetBrains Mono"/>
+              </a:rPr>
+              <a:t>  "roleId": "&lt;admin-role-id&gt;",</a:t>
+            </a:r>
+          </a:p>
+          <a:p>
+            <a:pPr algn="l"/>
+            <a:r>
+              <a:rPr sz="1400">
+                <a:solidFill>
+                  <a:srgbClr val="CBE7FF"/>
+                </a:solidFill>
+                <a:latin typeface="JetBrains Mono"/>
+              </a:rPr>
+              <a:t>  ...</a:t>
+            </a:r>
+          </a:p>
+          <a:p>
+            <a:pPr algn="l"/>
+            <a:r>
+              <a:rPr sz="1400">
+                <a:solidFill>
+                  <a:srgbClr val="CBE7FF"/>
+                </a:solidFill>
+                <a:latin typeface="JetBrains Mono"/>
+              </a:rPr>
+              <a:t>}</a:t>
+            </a:r>
+          </a:p>
+        </p:txBody>
+      </p:sp>
+      <p:sp>
+        <p:nvSpPr>
+          <p:cNvPr id="8" name="TextBox 7"/>
+          <p:cNvSpPr txBox="1"/>
+          <p:nvPr/>
+        </p:nvSpPr>
+        <p:spPr>
+          <a:xfrm>
+            <a:off x="685800" y="5029200"/>
+            <a:ext cx="10789920" cy="365760"/>
+          </a:xfrm>
+          <a:prstGeom prst="rect">
+            <a:avLst/>
+          </a:prstGeom>
+          <a:noFill/>
+        </p:spPr>
+        <p:txBody>
+          <a:bodyPr wrap="square" lIns="45720" rIns="45720" tIns="0" bIns="0">
+            <a:spAutoFit/>
+          </a:bodyPr>
+          <a:lstStyle/>
+          <a:p>
+            <a:pPr algn="l"/>
+            <a:r>
+              <a:rPr sz="1300" b="1">
+                <a:solidFill>
+                  <a:srgbClr val="F4A81E"/>
+                </a:solidFill>
+                <a:latin typeface="Inter"/>
+              </a:rPr>
+              <a:t>Response</a:t>
+            </a:r>
+          </a:p>
+        </p:txBody>
+      </p:sp>
+      <p:sp>
+        <p:nvSpPr>
+          <p:cNvPr id="9" name="Rounded Rectangle 8"/>
+          <p:cNvSpPr/>
+          <p:nvPr/>
+        </p:nvSpPr>
+        <p:spPr>
+          <a:xfrm>
+            <a:off x="685800" y="5394960"/>
+            <a:ext cx="10789920" cy="914400"/>
+          </a:xfrm>
+          <a:prstGeom prst="roundRect">
+            <a:avLst/>
+          </a:prstGeom>
+          <a:solidFill>
+            <a:srgbClr val="1B1F27"/>
+          </a:solidFill>
+          <a:ln w="9525">
+            <a:solidFill>
+              <a:srgbClr val="30353E"/>
+            </a:solidFill>
+          </a:ln>
+          <a:effectLst/>
+        </p:spPr>
+        <p:style>
+          <a:lnRef idx="1">
+            <a:schemeClr val="accent1"/>
+          </a:lnRef>
+          <a:fillRef idx="3">
+            <a:schemeClr val="accent1"/>
+          </a:fillRef>
+          <a:effectRef idx="2">
+            <a:schemeClr val="accent1"/>
+          </a:effectRef>
+          <a:fontRef idx="minor">
+            <a:schemeClr val="lt1"/>
+          </a:fontRef>
+        </p:style>
+        <p:txBody>
+          <a:bodyPr rtlCol="0" anchor="ctr"/>
+          <a:lstStyle/>
+          <a:p>
+            <a:pPr algn="ctr"/>
+          </a:p>
+        </p:txBody>
+      </p:sp>
+      <p:sp>
+        <p:nvSpPr>
+          <p:cNvPr id="10" name="TextBox 9"/>
+          <p:cNvSpPr txBox="1"/>
+          <p:nvPr/>
+        </p:nvSpPr>
+        <p:spPr>
+          <a:xfrm>
+            <a:off x="914400" y="5577840"/>
+            <a:ext cx="10332720" cy="548640"/>
+          </a:xfrm>
+          <a:prstGeom prst="rect">
+            <a:avLst/>
+          </a:prstGeom>
+          <a:noFill/>
+        </p:spPr>
+        <p:txBody>
+          <a:bodyPr wrap="square" lIns="0" rIns="0" tIns="0" bIns="0">
+            <a:spAutoFit/>
+          </a:bodyPr>
+          <a:lstStyle/>
+          <a:p>
+            <a:pPr algn="l"/>
+            <a:r>
+              <a:rPr sz="1400">
+                <a:solidFill>
+                  <a:srgbClr val="4ADE80"/>
+                </a:solidFill>
+                <a:latin typeface="JetBrains Mono"/>
+              </a:rPr>
+              <a:t>HTTP/2 201 Created                    ← admin user registered</a:t>
+            </a:r>
+          </a:p>
+          <a:p>
+            <a:pPr algn="l"/>
+            <a:r>
+              <a:rPr sz="1400">
+                <a:solidFill>
+                  <a:srgbClr val="CBE7FF"/>
+                </a:solidFill>
+                <a:latin typeface="JetBrains Mono"/>
+              </a:rPr>
+              <a:t/>
+            </a:r>
+          </a:p>
+          <a:p>
+            <a:pPr algn="l"/>
+            <a:r>
+              <a:rPr sz="1400">
+                <a:solidFill>
+                  <a:srgbClr val="CBE7FF"/>
+                </a:solidFill>
+                <a:latin typeface="JetBrains Mono"/>
+              </a:rPr>
+              <a:t>{"id":"6...", "userName":"jconesa", "roleId":"admin"}</a:t>
+            </a:r>
+          </a:p>
+        </p:txBody>
+      </p:sp>
+      <p:sp>
+        <p:nvSpPr>
+          <p:cNvPr id="11" name="Rectangle 10"/>
+          <p:cNvSpPr/>
+          <p:nvPr/>
+        </p:nvSpPr>
+        <p:spPr>
+          <a:xfrm>
+            <a:off x="457200" y="6263640"/>
+            <a:ext cx="365760" cy="36576"/>
+          </a:xfrm>
+          <a:prstGeom prst="rect">
+            <a:avLst/>
+          </a:prstGeom>
+          <a:solidFill>
+            <a:srgbClr val="F4A81E"/>
+          </a:solidFill>
+          <a:ln>
+            <a:noFill/>
+          </a:ln>
+          <a:effectLst/>
+        </p:spPr>
+        <p:style>
+          <a:lnRef idx="1">
+            <a:schemeClr val="accent1"/>
+          </a:lnRef>
+          <a:fillRef idx="3">
+            <a:schemeClr val="accent1"/>
+          </a:fillRef>
+          <a:effectRef idx="2">
+            <a:schemeClr val="accent1"/>
+          </a:effectRef>
+          <a:fontRef idx="minor">
+            <a:schemeClr val="lt1"/>
+          </a:fontRef>
+        </p:style>
+        <p:txBody>
+          <a:bodyPr rtlCol="0" anchor="ctr"/>
+          <a:lstStyle/>
+          <a:p>
+            <a:pPr algn="ctr"/>
+          </a:p>
+        </p:txBody>
+      </p:sp>
+    </p:spTree>
+  </p:cSld>
+  <p:clrMapOvr>
+    <a:masterClrMapping/>
+  </p:clrMapOvr>
+</p:sld>
+</file>
+
+<file path=ppt/slides/slide8.xml><?xml version="1.0" encoding="utf-8"?>
+<p:sld xmlns:a="http://schemas.openxmlformats.org/drawingml/2006/main" xmlns:p="http://schemas.openxmlformats.org/presentationml/2006/main" xmlns:r="http://schemas.openxmlformats.org/officeDocument/2006/relationships">
+  <p:cSld>
+    <p:spTree>
+      <p:nvGrpSpPr>
+        <p:cNvPr id="1" name=""/>
+        <p:cNvGrpSpPr/>
+        <p:nvPr/>
+      </p:nvGrpSpPr>
+      <p:grpSpPr/>
+      <p:sp>
+        <p:nvSpPr>
+          <p:cNvPr id="2" name="Rectangle 1"/>
+          <p:cNvSpPr/>
+          <p:nvPr/>
+        </p:nvSpPr>
+        <p:spPr>
+          <a:xfrm>
+            <a:off x="0" y="0"/>
+            <a:ext cx="12191695" cy="6858000"/>
+          </a:xfrm>
+          <a:prstGeom prst="rect">
+            <a:avLst/>
+          </a:prstGeom>
+          <a:solidFill>
+            <a:srgbClr val="101218"/>
+          </a:solidFill>
+          <a:ln>
+            <a:noFill/>
+          </a:ln>
+          <a:effectLst/>
+        </p:spPr>
+        <p:style>
+          <a:lnRef idx="1">
+            <a:schemeClr val="accent1"/>
+          </a:lnRef>
+          <a:fillRef idx="3">
+            <a:schemeClr val="accent1"/>
+          </a:fillRef>
+          <a:effectRef idx="2">
+            <a:schemeClr val="accent1"/>
+          </a:effectRef>
+          <a:fontRef idx="minor">
+            <a:schemeClr val="lt1"/>
+          </a:fontRef>
+        </p:style>
+        <p:txBody>
+          <a:bodyPr rtlCol="0" anchor="ctr"/>
+          <a:lstStyle/>
+          <a:p>
+            <a:pPr algn="ctr"/>
+          </a:p>
+        </p:txBody>
+      </p:sp>
+      <p:sp>
+        <p:nvSpPr>
+          <p:cNvPr id="3" name="TextBox 2"/>
+          <p:cNvSpPr txBox="1"/>
+          <p:nvPr/>
+        </p:nvSpPr>
+        <p:spPr>
+          <a:xfrm>
+            <a:off x="685800" y="502920"/>
+            <a:ext cx="10789920" cy="640080"/>
+          </a:xfrm>
+          <a:prstGeom prst="rect">
+            <a:avLst/>
+          </a:prstGeom>
+          <a:noFill/>
+        </p:spPr>
+        <p:txBody>
+          <a:bodyPr wrap="square" lIns="45720" rIns="45720" tIns="0" bIns="0">
+            <a:spAutoFit/>
+          </a:bodyPr>
+          <a:lstStyle/>
+          <a:p>
+            <a:pPr algn="l"/>
+            <a:r>
+              <a:rPr sz="3400" b="1">
+                <a:solidFill>
+                  <a:srgbClr val="E5E7EB"/>
+                </a:solidFill>
+                <a:latin typeface="Inter"/>
+              </a:rPr>
+              <a:t>Another one, found manually.</a:t>
+            </a:r>
+          </a:p>
+        </p:txBody>
+      </p:sp>
+      <p:pic>
+        <p:nvPicPr>
+          <p:cNvPr id="4" name="Picture 3" descr="tomcat-bypass.png"/>
+          <p:cNvPicPr>
+            <a:picLocks noChangeAspect="1"/>
+          </p:cNvPicPr>
+          <p:nvPr/>
+        </p:nvPicPr>
+        <p:blipFill>
+          <a:blip r:embed="rId2"/>
+          <a:stretch>
+            <a:fillRect/>
+          </a:stretch>
+        </p:blipFill>
+        <p:spPr>
+          <a:xfrm>
+            <a:off x="685800" y="1188720"/>
+            <a:ext cx="10789920" cy="2011680"/>
+          </a:xfrm>
+          <a:prstGeom prst="rect">
+            <a:avLst/>
+          </a:prstGeom>
+        </p:spPr>
+      </p:pic>
+      <p:sp>
+        <p:nvSpPr>
+          <p:cNvPr id="5" name="TextBox 4"/>
+          <p:cNvSpPr txBox="1"/>
+          <p:nvPr/>
+        </p:nvSpPr>
+        <p:spPr>
+          <a:xfrm>
+            <a:off x="685800" y="3429000"/>
+            <a:ext cx="5394960" cy="365760"/>
+          </a:xfrm>
+          <a:prstGeom prst="rect">
+            <a:avLst/>
+          </a:prstGeom>
+          <a:noFill/>
+        </p:spPr>
+        <p:txBody>
+          <a:bodyPr wrap="square" lIns="45720" rIns="45720" tIns="0" bIns="0">
+            <a:spAutoFit/>
+          </a:bodyPr>
+          <a:lstStyle/>
+          <a:p>
+            <a:pPr algn="l"/>
+            <a:r>
+              <a:rPr sz="1300" b="1">
+                <a:solidFill>
+                  <a:srgbClr val="F4A81E"/>
+                </a:solidFill>
+                <a:latin typeface="Inter"/>
+              </a:rPr>
+              <a:t>The proxy config (Nginx)</a:t>
+            </a:r>
+          </a:p>
+        </p:txBody>
+      </p:sp>
+      <p:sp>
+        <p:nvSpPr>
+          <p:cNvPr id="6" name="Rounded Rectangle 5"/>
+          <p:cNvSpPr/>
+          <p:nvPr/>
+        </p:nvSpPr>
+        <p:spPr>
+          <a:xfrm>
+            <a:off x="685800" y="3794760"/>
+            <a:ext cx="5394960" cy="1371600"/>
+          </a:xfrm>
+          <a:prstGeom prst="roundRect">
+            <a:avLst/>
+          </a:prstGeom>
+          <a:solidFill>
+            <a:srgbClr val="1B1F27"/>
+          </a:solidFill>
+          <a:ln w="9525">
+            <a:solidFill>
+              <a:srgbClr val="30353E"/>
+            </a:solidFill>
+          </a:ln>
+          <a:effectLst/>
+        </p:spPr>
+        <p:style>
+          <a:lnRef idx="1">
+            <a:schemeClr val="accent1"/>
+          </a:lnRef>
+          <a:fillRef idx="3">
+            <a:schemeClr val="accent1"/>
+          </a:fillRef>
+          <a:effectRef idx="2">
+            <a:schemeClr val="accent1"/>
+          </a:effectRef>
+          <a:fontRef idx="minor">
+            <a:schemeClr val="lt1"/>
+          </a:fontRef>
+        </p:style>
+        <p:txBody>
+          <a:bodyPr rtlCol="0" anchor="ctr"/>
+          <a:lstStyle/>
+          <a:p>
+            <a:pPr algn="ctr"/>
+          </a:p>
+        </p:txBody>
+      </p:sp>
+      <p:sp>
+        <p:nvSpPr>
+          <p:cNvPr id="7" name="TextBox 6"/>
+          <p:cNvSpPr txBox="1"/>
+          <p:nvPr/>
+        </p:nvSpPr>
+        <p:spPr>
+          <a:xfrm>
+            <a:off x="914400" y="3977640"/>
+            <a:ext cx="4937760" cy="1005840"/>
+          </a:xfrm>
+          <a:prstGeom prst="rect">
+            <a:avLst/>
+          </a:prstGeom>
+          <a:noFill/>
+        </p:spPr>
+        <p:txBody>
+          <a:bodyPr wrap="square" lIns="0" rIns="0" tIns="0" bIns="0">
+            <a:spAutoFit/>
+          </a:bodyPr>
+          <a:lstStyle/>
+          <a:p>
+            <a:pPr algn="l"/>
+            <a:r>
+              <a:rPr sz="1400">
+                <a:solidFill>
+                  <a:srgbClr val="CBE7FF"/>
+                </a:solidFill>
+                <a:latin typeface="JetBrains Mono"/>
+              </a:rPr>
+              <a:t>location /script/ {</a:t>
+            </a:r>
+          </a:p>
+          <a:p>
+            <a:pPr algn="l"/>
+            <a:r>
+              <a:rPr sz="1400">
+                <a:solidFill>
+                  <a:srgbClr val="CBE7FF"/>
+                </a:solidFill>
+                <a:latin typeface="JetBrains Mono"/>
+              </a:rPr>
+              <a:t>    proxy_pass http://tomcat:8080;</a:t>
+            </a:r>
+          </a:p>
+          <a:p>
+            <a:pPr algn="l"/>
+            <a:r>
+              <a:rPr sz="1400">
+                <a:solidFill>
+                  <a:srgbClr val="CBE7FF"/>
+                </a:solidFill>
+                <a:latin typeface="JetBrains Mono"/>
+              </a:rPr>
+              <a:t>}</a:t>
+            </a:r>
+          </a:p>
+          <a:p>
+            <a:pPr algn="l"/>
+            <a:r>
+              <a:rPr sz="1400">
+                <a:solidFill>
+                  <a:srgbClr val="CBE7FF"/>
+                </a:solidFill>
+                <a:latin typeface="JetBrains Mono"/>
+              </a:rPr>
+              <a:t/>
+            </a:r>
+          </a:p>
+          <a:p>
+            <a:pPr algn="l"/>
+            <a:r>
+              <a:rPr sz="1400">
+                <a:solidFill>
+                  <a:srgbClr val="9CA3AF"/>
+                </a:solidFill>
+                <a:latin typeface="JetBrains Mono"/>
+              </a:rPr>
+              <a:t># Nginx treats ..;  as a literal name</a:t>
+            </a:r>
+          </a:p>
+        </p:txBody>
+      </p:sp>
+      <p:sp>
+        <p:nvSpPr>
+          <p:cNvPr id="8" name="TextBox 7"/>
+          <p:cNvSpPr txBox="1"/>
+          <p:nvPr/>
+        </p:nvSpPr>
+        <p:spPr>
+          <a:xfrm>
+            <a:off x="6309360" y="3429000"/>
+            <a:ext cx="5394960" cy="365760"/>
+          </a:xfrm>
+          <a:prstGeom prst="rect">
+            <a:avLst/>
+          </a:prstGeom>
+          <a:noFill/>
+        </p:spPr>
+        <p:txBody>
+          <a:bodyPr wrap="square" lIns="45720" rIns="45720" tIns="0" bIns="0">
+            <a:spAutoFit/>
+          </a:bodyPr>
+          <a:lstStyle/>
+          <a:p>
+            <a:pPr algn="l"/>
+            <a:r>
+              <a:rPr sz="1300" b="1">
+                <a:solidFill>
+                  <a:srgbClr val="F4A81E"/>
+                </a:solidFill>
+                <a:latin typeface="Inter"/>
+              </a:rPr>
+              <a:t>What Tomcat actually does</a:t>
+            </a:r>
+          </a:p>
+        </p:txBody>
+      </p:sp>
+      <p:sp>
+        <p:nvSpPr>
+          <p:cNvPr id="9" name="Rounded Rectangle 8"/>
+          <p:cNvSpPr/>
+          <p:nvPr/>
+        </p:nvSpPr>
+        <p:spPr>
+          <a:xfrm>
+            <a:off x="6309360" y="3794760"/>
+            <a:ext cx="5394960" cy="1371600"/>
+          </a:xfrm>
+          <a:prstGeom prst="roundRect">
+            <a:avLst/>
+          </a:prstGeom>
+          <a:solidFill>
+            <a:srgbClr val="1B1F27"/>
+          </a:solidFill>
+          <a:ln w="9525">
+            <a:solidFill>
+              <a:srgbClr val="30353E"/>
+            </a:solidFill>
+          </a:ln>
+          <a:effectLst/>
+        </p:spPr>
+        <p:style>
+          <a:lnRef idx="1">
+            <a:schemeClr val="accent1"/>
+          </a:lnRef>
+          <a:fillRef idx="3">
+            <a:schemeClr val="accent1"/>
+          </a:fillRef>
+          <a:effectRef idx="2">
+            <a:schemeClr val="accent1"/>
+          </a:effectRef>
+          <a:fontRef idx="minor">
+            <a:schemeClr val="lt1"/>
+          </a:fontRef>
+        </p:style>
+        <p:txBody>
+          <a:bodyPr rtlCol="0" anchor="ctr"/>
+          <a:lstStyle/>
+          <a:p>
+            <a:pPr algn="ctr"/>
+          </a:p>
+        </p:txBody>
+      </p:sp>
+      <p:sp>
+        <p:nvSpPr>
+          <p:cNvPr id="10" name="TextBox 9"/>
+          <p:cNvSpPr txBox="1"/>
+          <p:nvPr/>
+        </p:nvSpPr>
+        <p:spPr>
+          <a:xfrm>
+            <a:off x="6537960" y="3977640"/>
+            <a:ext cx="4937760" cy="1005840"/>
+          </a:xfrm>
+          <a:prstGeom prst="rect">
+            <a:avLst/>
+          </a:prstGeom>
+          <a:noFill/>
+        </p:spPr>
+        <p:txBody>
+          <a:bodyPr wrap="square" lIns="0" rIns="0" tIns="0" bIns="0">
+            <a:spAutoFit/>
+          </a:bodyPr>
+          <a:lstStyle/>
+          <a:p>
+            <a:pPr algn="l"/>
+            <a:r>
+              <a:rPr sz="1400">
+                <a:solidFill>
+                  <a:srgbClr val="CBE7FF"/>
+                </a:solidFill>
+                <a:latin typeface="JetBrains Mono"/>
+              </a:rPr>
+              <a:t>GET /script/..;/</a:t>
+            </a:r>
+          </a:p>
+          <a:p>
+            <a:pPr algn="l"/>
+            <a:r>
+              <a:rPr sz="1400">
+                <a:solidFill>
+                  <a:srgbClr val="CBE7FF"/>
+                </a:solidFill>
+                <a:latin typeface="JetBrains Mono"/>
+              </a:rPr>
+              <a:t>   strip ;   →  /script/../</a:t>
+            </a:r>
+          </a:p>
+          <a:p>
+            <a:pPr algn="l"/>
+            <a:r>
+              <a:rPr sz="1400">
+                <a:solidFill>
+                  <a:srgbClr val="4ADE80"/>
+                </a:solidFill>
+                <a:latin typeface="JetBrains Mono"/>
+              </a:rPr>
+              <a:t>   normalize →  /</a:t>
+            </a:r>
+          </a:p>
+          <a:p>
+            <a:pPr algn="l"/>
+            <a:r>
+              <a:rPr sz="1400">
+                <a:solidFill>
+                  <a:srgbClr val="CBE7FF"/>
+                </a:solidFill>
+                <a:latin typeface="JetBrains Mono"/>
+              </a:rPr>
+              <a:t/>
+            </a:r>
+          </a:p>
+          <a:p>
+            <a:pPr algn="l"/>
+            <a:r>
+              <a:rPr sz="1400">
+                <a:solidFill>
+                  <a:srgbClr val="4ADE80"/>
+                </a:solidFill>
+                <a:latin typeface="JetBrains Mono"/>
+              </a:rPr>
+              <a:t># ROOT context served, unauth</a:t>
+            </a:r>
+          </a:p>
+        </p:txBody>
+      </p:sp>
+      <p:sp>
+        <p:nvSpPr>
+          <p:cNvPr id="11" name="TextBox 10"/>
+          <p:cNvSpPr txBox="1"/>
+          <p:nvPr/>
+        </p:nvSpPr>
+        <p:spPr>
+          <a:xfrm>
+            <a:off x="685800" y="5349240"/>
+            <a:ext cx="10789920" cy="457200"/>
+          </a:xfrm>
+          <a:prstGeom prst="rect">
+            <a:avLst/>
+          </a:prstGeom>
+          <a:noFill/>
+        </p:spPr>
+        <p:txBody>
+          <a:bodyPr wrap="square" lIns="45720" rIns="45720" tIns="0" bIns="0">
+            <a:spAutoFit/>
+          </a:bodyPr>
+          <a:lstStyle/>
+          <a:p>
+            <a:pPr algn="l"/>
+            <a:r>
+              <a:rPr sz="1400" b="1">
+                <a:solidFill>
+                  <a:srgbClr val="9CA3AF"/>
+                </a:solidFill>
+                <a:latin typeface="Inter"/>
+              </a:rPr>
+              <a:t>Proxy and origin disagree on what ..;/ means. Orange Tsai's canonical technique — Uber, Amazon, Bynder all fell to this.</a:t>
+            </a:r>
+          </a:p>
+        </p:txBody>
+      </p:sp>
+      <p:sp>
+        <p:nvSpPr>
+          <p:cNvPr id="12" name="Rectangle 11"/>
+          <p:cNvSpPr/>
+          <p:nvPr/>
+        </p:nvSpPr>
+        <p:spPr>
+          <a:xfrm>
+            <a:off x="457200" y="6263640"/>
+            <a:ext cx="365760" cy="36576"/>
+          </a:xfrm>
+          <a:prstGeom prst="rect">
+            <a:avLst/>
+          </a:prstGeom>
+          <a:solidFill>
+            <a:srgbClr val="F4A81E"/>
+          </a:solidFill>
+          <a:ln>
+            <a:noFill/>
+          </a:ln>
+          <a:effectLst/>
+        </p:spPr>
+        <p:style>
+          <a:lnRef idx="1">
+            <a:schemeClr val="accent1"/>
+          </a:lnRef>
+          <a:fillRef idx="3">
+            <a:schemeClr val="accent1"/>
+          </a:fillRef>
+          <a:effectRef idx="2">
+            <a:schemeClr val="accent1"/>
+          </a:effectRef>
+          <a:fontRef idx="minor">
+            <a:schemeClr val="lt1"/>
+          </a:fontRef>
+        </p:style>
+        <p:txBody>
+          <a:bodyPr rtlCol="0" anchor="ctr"/>
+          <a:lstStyle/>
+          <a:p>
+            <a:pPr algn="ctr"/>
+          </a:p>
+        </p:txBody>
+      </p:sp>
+    </p:spTree>
+  </p:cSld>
+  <p:clrMapOvr>
+    <a:masterClrMapping/>
+  </p:clrMapOvr>
+</p:sld>
+</file>
+
+<file path=ppt/slides/slide9.xml><?xml version="1.0" encoding="utf-8"?>
+<p:sld xmlns:a="http://schemas.openxmlformats.org/drawingml/2006/main" xmlns:p="http://schemas.openxmlformats.org/presentationml/2006/main" xmlns:r="http://schemas.openxmlformats.org/officeDocument/2006/relationships">
+  <p:cSld>
+    <p:spTree>
+      <p:nvGrpSpPr>
+        <p:cNvPr id="1" name=""/>
+        <p:cNvGrpSpPr/>
+        <p:nvPr/>
+      </p:nvGrpSpPr>
+      <p:grpSpPr/>
+      <p:sp>
+        <p:nvSpPr>
+          <p:cNvPr id="2" name="Rectangle 1"/>
+          <p:cNvSpPr/>
+          <p:nvPr/>
+        </p:nvSpPr>
+        <p:spPr>
+          <a:xfrm>
+            <a:off x="0" y="0"/>
+            <a:ext cx="12191695" cy="6858000"/>
+          </a:xfrm>
+          <a:prstGeom prst="rect">
+            <a:avLst/>
+          </a:prstGeom>
+          <a:solidFill>
+            <a:srgbClr val="101218"/>
+          </a:solidFill>
+          <a:ln>
+            <a:noFill/>
+          </a:ln>
+          <a:effectLst/>
+        </p:spPr>
+        <p:style>
+          <a:lnRef idx="1">
+            <a:schemeClr val="accent1"/>
+          </a:lnRef>
+          <a:fillRef idx="3">
+            <a:schemeClr val="accent1"/>
+          </a:fillRef>
+          <a:effectRef idx="2">
+            <a:schemeClr val="accent1"/>
+          </a:effectRef>
+          <a:fontRef idx="minor">
+            <a:schemeClr val="lt1"/>
+          </a:fontRef>
+        </p:style>
+        <p:txBody>
+          <a:bodyPr rtlCol="0" anchor="ctr"/>
+          <a:lstStyle/>
+          <a:p>
+            <a:pPr algn="ctr"/>
+          </a:p>
+        </p:txBody>
+      </p:sp>
+      <p:sp>
+        <p:nvSpPr>
+          <p:cNvPr id="3" name="TextBox 2"/>
+          <p:cNvSpPr txBox="1"/>
+          <p:nvPr/>
+        </p:nvSpPr>
+        <p:spPr>
+          <a:xfrm>
+            <a:off x="685800" y="502920"/>
+            <a:ext cx="10789920" cy="640080"/>
+          </a:xfrm>
+          <a:prstGeom prst="rect">
+            <a:avLst/>
+          </a:prstGeom>
+          <a:noFill/>
+        </p:spPr>
+        <p:txBody>
+          <a:bodyPr wrap="square" lIns="45720" rIns="45720" tIns="0" bIns="0">
+            <a:spAutoFit/>
+          </a:bodyPr>
+          <a:lstStyle/>
+          <a:p>
+            <a:pPr algn="l"/>
+            <a:r>
+              <a:rPr sz="3600" b="1">
+                <a:solidFill>
+                  <a:srgbClr val="E5E7EB"/>
+                </a:solidFill>
+                <a:latin typeface="Inter"/>
+              </a:rPr>
+              <a:t>URL Validation tab.</a:t>
+            </a:r>
+          </a:p>
+        </p:txBody>
+      </p:sp>
+      <p:sp>
+        <p:nvSpPr>
+          <p:cNvPr id="4" name="TextBox 3"/>
+          <p:cNvSpPr txBox="1"/>
+          <p:nvPr/>
+        </p:nvSpPr>
+        <p:spPr>
+          <a:xfrm>
+            <a:off x="685800" y="1143000"/>
+            <a:ext cx="10789920" cy="457200"/>
+          </a:xfrm>
+          <a:prstGeom prst="rect">
+            <a:avLst/>
+          </a:prstGeom>
+          <a:noFill/>
+        </p:spPr>
+        <p:txBody>
+          <a:bodyPr wrap="square" lIns="45720" rIns="45720" tIns="0" bIns="0">
+            <a:spAutoFit/>
+          </a:bodyPr>
+          <a:lstStyle/>
+          <a:p>
+            <a:pPr algn="l"/>
+            <a:r>
+              <a:rPr sz="1600" b="0">
+                <a:solidFill>
+                  <a:srgbClr val="9CA3AF"/>
+                </a:solidFill>
+                <a:latin typeface="Inter"/>
+              </a:rPr>
+              <a:t>Different bypass, same tool. Tests SSRF, open-redirect, and CORS allowlist bypasses.</a:t>
+            </a:r>
+          </a:p>
+        </p:txBody>
+      </p:sp>
+      <p:sp>
+        <p:nvSpPr>
+          <p:cNvPr id="5" name="Rounded Rectangle 4"/>
+          <p:cNvSpPr/>
+          <p:nvPr/>
+        </p:nvSpPr>
+        <p:spPr>
+          <a:xfrm>
+            <a:off x="685800" y="1920240"/>
+            <a:ext cx="10789920" cy="1234440"/>
+          </a:xfrm>
+          <a:prstGeom prst="roundRect">
+            <a:avLst/>
+          </a:prstGeom>
+          <a:solidFill>
+            <a:srgbClr val="1B1F27"/>
+          </a:solidFill>
+          <a:ln w="9525">
+            <a:solidFill>
+              <a:srgbClr val="30353E"/>
+            </a:solidFill>
+          </a:ln>
+          <a:effectLst/>
+        </p:spPr>
+        <p:style>
+          <a:lnRef idx="1">
+            <a:schemeClr val="accent1"/>
+          </a:lnRef>
+          <a:fillRef idx="3">
+            <a:schemeClr val="accent1"/>
+          </a:fillRef>
+          <a:effectRef idx="2">
+            <a:schemeClr val="accent1"/>
+          </a:effectRef>
+          <a:fontRef idx="minor">
+            <a:schemeClr val="lt1"/>
+          </a:fontRef>
+        </p:style>
+        <p:txBody>
+          <a:bodyPr rtlCol="0" anchor="ctr"/>
+          <a:lstStyle/>
+          <a:p>
+            <a:pPr algn="ctr"/>
+          </a:p>
+        </p:txBody>
+      </p:sp>
+      <p:sp>
+        <p:nvSpPr>
+          <p:cNvPr id="6" name="Rectangle 5"/>
+          <p:cNvSpPr/>
+          <p:nvPr/>
+        </p:nvSpPr>
+        <p:spPr>
+          <a:xfrm>
+            <a:off x="685800" y="1920240"/>
+            <a:ext cx="73152" cy="1234440"/>
+          </a:xfrm>
+          <a:prstGeom prst="rect">
+            <a:avLst/>
+          </a:prstGeom>
+          <a:solidFill>
+            <a:srgbClr val="F4A81E"/>
+          </a:solidFill>
+          <a:ln>
+            <a:noFill/>
+          </a:ln>
+          <a:effectLst/>
+        </p:spPr>
+        <p:style>
+          <a:lnRef idx="1">
+            <a:schemeClr val="accent1"/>
+          </a:lnRef>
+          <a:fillRef idx="3">
+            <a:schemeClr val="accent1"/>
+          </a:fillRef>
+          <a:effectRef idx="2">
+            <a:schemeClr val="accent1"/>
+          </a:effectRef>
+          <a:fontRef idx="minor">
+            <a:schemeClr val="lt1"/>
+          </a:fontRef>
+        </p:style>
+        <p:txBody>
+          <a:bodyPr rtlCol="0" anchor="ctr"/>
+          <a:lstStyle/>
+          <a:p>
+            <a:pPr algn="ctr"/>
+          </a:p>
+        </p:txBody>
+      </p:sp>
+      <p:sp>
+        <p:nvSpPr>
+          <p:cNvPr id="7" name="TextBox 6"/>
+          <p:cNvSpPr txBox="1"/>
+          <p:nvPr/>
+        </p:nvSpPr>
+        <p:spPr>
+          <a:xfrm>
+            <a:off x="960120" y="2011680"/>
+            <a:ext cx="10515600" cy="274320"/>
+          </a:xfrm>
+          <a:prstGeom prst="rect">
+            <a:avLst/>
+          </a:prstGeom>
+          <a:noFill/>
+        </p:spPr>
+        <p:txBody>
+          <a:bodyPr wrap="square" lIns="45720" rIns="45720" tIns="0" bIns="0">
+            <a:spAutoFit/>
+          </a:bodyPr>
+          <a:lstStyle/>
+          <a:p>
+            <a:pPr algn="l"/>
+            <a:r>
+              <a:rPr sz="1100" b="1">
+                <a:solidFill>
+                  <a:srgbClr val="F4A81E"/>
+                </a:solidFill>
+                <a:latin typeface="Inter"/>
+              </a:rPr>
+              <a:t>PORTSWIGGER RESEARCH  ·  OPEN SOURCE DATA</a:t>
+            </a:r>
+          </a:p>
+        </p:txBody>
+      </p:sp>
+      <p:sp>
+        <p:nvSpPr>
+          <p:cNvPr id="8" name="TextBox 7"/>
+          <p:cNvSpPr txBox="1"/>
+          <p:nvPr/>
+        </p:nvSpPr>
+        <p:spPr>
+          <a:xfrm>
+            <a:off x="960120" y="2240280"/>
+            <a:ext cx="10515600" cy="411480"/>
+          </a:xfrm>
+          <a:prstGeom prst="rect">
+            <a:avLst/>
+          </a:prstGeom>
+          <a:noFill/>
+        </p:spPr>
+        <p:txBody>
+          <a:bodyPr wrap="square" lIns="45720" rIns="45720" tIns="0" bIns="0">
+            <a:spAutoFit/>
+          </a:bodyPr>
+          <a:lstStyle/>
+          <a:p>
+            <a:pPr algn="l"/>
+            <a:r>
+              <a:rPr sz="1800" b="1">
+                <a:solidFill>
+                  <a:srgbClr val="E5E7EB"/>
+                </a:solidFill>
+                <a:latin typeface="Inter"/>
+              </a:rPr>
+              <a:t>URL Validation Bypass Cheat Sheet</a:t>
+            </a:r>
+          </a:p>
+        </p:txBody>
+      </p:sp>
+      <p:sp>
+        <p:nvSpPr>
+          <p:cNvPr id="9" name="TextBox 8"/>
+          <p:cNvSpPr txBox="1"/>
+          <p:nvPr/>
+        </p:nvSpPr>
+        <p:spPr>
+          <a:xfrm>
+            <a:off x="960120" y="2606040"/>
+            <a:ext cx="10515600" cy="274320"/>
+          </a:xfrm>
+          <a:prstGeom prst="rect">
+            <a:avLst/>
+          </a:prstGeom>
+          <a:noFill/>
+        </p:spPr>
+        <p:txBody>
+          <a:bodyPr wrap="square" lIns="45720" rIns="45720" tIns="0" bIns="0">
+            <a:spAutoFit/>
+          </a:bodyPr>
+          <a:lstStyle/>
+          <a:p>
+            <a:pPr algn="l"/>
+            <a:r>
+              <a:rPr sz="1200" b="0">
+                <a:solidFill>
+                  <a:srgbClr val="9CA3AF"/>
+                </a:solidFill>
+                <a:latin typeface="Inter"/>
+              </a:rPr>
+              <a:t>portswigger.net/web-security/ssrf/url-validation-bypass-cheat-sheet</a:t>
+            </a:r>
+          </a:p>
+        </p:txBody>
+      </p:sp>
+      <p:sp>
+        <p:nvSpPr>
+          <p:cNvPr id="10" name="TextBox 9"/>
+          <p:cNvSpPr txBox="1"/>
+          <p:nvPr/>
+        </p:nvSpPr>
+        <p:spPr>
+          <a:xfrm>
+            <a:off x="960120" y="2852928"/>
+            <a:ext cx="10515600" cy="274320"/>
+          </a:xfrm>
+          <a:prstGeom prst="rect">
+            <a:avLst/>
+          </a:prstGeom>
+          <a:noFill/>
+        </p:spPr>
+        <p:txBody>
+          <a:bodyPr wrap="square" lIns="45720" rIns="45720" tIns="0" bIns="0">
+            <a:spAutoFit/>
+          </a:bodyPr>
+          <a:lstStyle/>
+          <a:p>
+            <a:pPr algn="l"/>
+            <a:r>
+              <a:rPr sz="1000" b="0">
+                <a:solidFill>
+                  <a:srgbClr val="CBE7FF"/>
+                </a:solidFill>
+                <a:latin typeface="JetBrains Mono"/>
+              </a:rPr>
+              <a:t>github.com/PortSwigger/url-cheatsheet-data  ·  6 categories  ·  open to community PRs</a:t>
+            </a:r>
+          </a:p>
+        </p:txBody>
+      </p:sp>
+      <p:sp>
+        <p:nvSpPr>
+          <p:cNvPr id="11" name="TextBox 10"/>
+          <p:cNvSpPr txBox="1"/>
+          <p:nvPr/>
+        </p:nvSpPr>
+        <p:spPr>
+          <a:xfrm>
+            <a:off x="685800" y="3383280"/>
+            <a:ext cx="10789920" cy="365760"/>
+          </a:xfrm>
+          <a:prstGeom prst="rect">
+            <a:avLst/>
+          </a:prstGeom>
+          <a:noFill/>
+        </p:spPr>
+        <p:txBody>
+          <a:bodyPr wrap="square" lIns="45720" rIns="45720" tIns="0" bIns="0">
+            <a:spAutoFit/>
+          </a:bodyPr>
+          <a:lstStyle/>
+          <a:p>
+            <a:pPr algn="l"/>
+            <a:r>
+              <a:rPr sz="1500" b="1">
+                <a:solidFill>
+                  <a:srgbClr val="F4A81E"/>
+                </a:solidFill>
+                <a:latin typeface="Inter"/>
+              </a:rPr>
+              <a:t>Payloads synced directly from the PortSwigger GitHub repo. Emitted across 3 contexts × 5 encodings.</a:t>
+            </a:r>
+          </a:p>
+        </p:txBody>
+      </p:sp>
+      <p:sp>
+        <p:nvSpPr>
+          <p:cNvPr id="12" name="Rounded Rectangle 11"/>
+          <p:cNvSpPr/>
+          <p:nvPr/>
+        </p:nvSpPr>
+        <p:spPr>
+          <a:xfrm>
+            <a:off x="685800" y="3840480"/>
+            <a:ext cx="3429000" cy="1828800"/>
+          </a:xfrm>
+          <a:prstGeom prst="roundRect">
+            <a:avLst/>
+          </a:prstGeom>
+          <a:solidFill>
+            <a:srgbClr val="1B1F27"/>
+          </a:solidFill>
+          <a:ln w="9525">
+            <a:solidFill>
+              <a:srgbClr val="30353E"/>
+            </a:solidFill>
+          </a:ln>
+          <a:effectLst/>
+        </p:spPr>
+        <p:style>
+          <a:lnRef idx="1">
+            <a:schemeClr val="accent1"/>
+          </a:lnRef>
+          <a:fillRef idx="3">
+            <a:schemeClr val="accent1"/>
+          </a:fillRef>
+          <a:effectRef idx="2">
+            <a:schemeClr val="accent1"/>
+          </a:effectRef>
+          <a:fontRef idx="minor">
+            <a:schemeClr val="lt1"/>
+          </a:fontRef>
+        </p:style>
+        <p:txBody>
+          <a:bodyPr rtlCol="0" anchor="ctr"/>
+          <a:lstStyle/>
+          <a:p>
+            <a:pPr algn="ctr"/>
+          </a:p>
+        </p:txBody>
+      </p:sp>
+      <p:sp>
+        <p:nvSpPr>
+          <p:cNvPr id="13" name="TextBox 12"/>
+          <p:cNvSpPr txBox="1"/>
+          <p:nvPr/>
+        </p:nvSpPr>
+        <p:spPr>
+          <a:xfrm>
+            <a:off x="914400" y="4023360"/>
+            <a:ext cx="2971800" cy="1463040"/>
+          </a:xfrm>
+          <a:prstGeom prst="rect">
+            <a:avLst/>
+          </a:prstGeom>
+          <a:noFill/>
+        </p:spPr>
+        <p:txBody>
+          <a:bodyPr wrap="square" lIns="0" rIns="0" tIns="0" bIns="0">
+            <a:spAutoFit/>
+          </a:bodyPr>
+          <a:lstStyle/>
+          <a:p>
+            <a:pPr algn="l"/>
+            <a:r>
+              <a:rPr sz="1200">
+                <a:solidFill>
+                  <a:srgbClr val="F4A81E"/>
+                </a:solidFill>
+                <a:latin typeface="JetBrains Mono"/>
+              </a:rPr>
+              <a:t>Domain allowlist bypass</a:t>
+            </a:r>
+          </a:p>
+          <a:p>
+            <a:pPr algn="l"/>
+            <a:r>
+              <a:rPr sz="1200">
+                <a:solidFill>
+                  <a:srgbClr val="4ADE80"/>
+                </a:solidFill>
+                <a:latin typeface="JetBrains Mono"/>
+              </a:rPr>
+              <a:t>94 payloads</a:t>
+            </a:r>
+          </a:p>
+          <a:p>
+            <a:pPr algn="l"/>
+            <a:r>
+              <a:rPr sz="1200">
+                <a:solidFill>
+                  <a:srgbClr val="CBE7FF"/>
+                </a:solidFill>
+                <a:latin typeface="JetBrains Mono"/>
+              </a:rPr>
+              <a:t/>
+            </a:r>
+          </a:p>
+          <a:p>
+            <a:pPr algn="l"/>
+            <a:r>
+              <a:rPr sz="1200">
+                <a:solidFill>
+                  <a:srgbClr val="9CA3AF"/>
+                </a:solidFill>
+                <a:latin typeface="JetBrains Mono"/>
+              </a:rPr>
+              <a:t>Subdomain tricks, userinfo</a:t>
+            </a:r>
+          </a:p>
+          <a:p>
+            <a:pPr algn="l"/>
+            <a:r>
+              <a:rPr sz="1200">
+                <a:solidFill>
+                  <a:srgbClr val="9CA3AF"/>
+                </a:solidFill>
+                <a:latin typeface="JetBrains Mono"/>
+              </a:rPr>
+              <a:t>confusion, @-splitting,</a:t>
+            </a:r>
+          </a:p>
+          <a:p>
+            <a:pPr algn="l"/>
+            <a:r>
+              <a:rPr sz="1200">
+                <a:solidFill>
+                  <a:srgbClr val="9CA3AF"/>
+                </a:solidFill>
+                <a:latin typeface="JetBrains Mono"/>
+              </a:rPr>
+              <a:t>port-based bypasses</a:t>
+            </a:r>
+          </a:p>
+        </p:txBody>
+      </p:sp>
+      <p:sp>
+        <p:nvSpPr>
+          <p:cNvPr id="14" name="Rounded Rectangle 13"/>
+          <p:cNvSpPr/>
+          <p:nvPr/>
+        </p:nvSpPr>
+        <p:spPr>
+          <a:xfrm>
+            <a:off x="4297680" y="3840480"/>
+            <a:ext cx="3429000" cy="1828800"/>
+          </a:xfrm>
+          <a:prstGeom prst="roundRect">
+            <a:avLst/>
+          </a:prstGeom>
+          <a:solidFill>
+            <a:srgbClr val="1B1F27"/>
+          </a:solidFill>
+          <a:ln w="9525">
+            <a:solidFill>
+              <a:srgbClr val="30353E"/>
+            </a:solidFill>
+          </a:ln>
+          <a:effectLst/>
+        </p:spPr>
+        <p:style>
+          <a:lnRef idx="1">
+            <a:schemeClr val="accent1"/>
+          </a:lnRef>
+          <a:fillRef idx="3">
+            <a:schemeClr val="accent1"/>
+          </a:fillRef>
+          <a:effectRef idx="2">
+            <a:schemeClr val="accent1"/>
+          </a:effectRef>
+          <a:fontRef idx="minor">
+            <a:schemeClr val="lt1"/>
+          </a:fontRef>
+        </p:style>
+        <p:txBody>
+          <a:bodyPr rtlCol="0" anchor="ctr"/>
+          <a:lstStyle/>
+          <a:p>
+            <a:pPr algn="ctr"/>
+          </a:p>
+        </p:txBody>
+      </p:sp>
+      <p:sp>
+        <p:nvSpPr>
+          <p:cNvPr id="15" name="TextBox 14"/>
+          <p:cNvSpPr txBox="1"/>
+          <p:nvPr/>
+        </p:nvSpPr>
+        <p:spPr>
+          <a:xfrm>
+            <a:off x="4526280" y="4023360"/>
+            <a:ext cx="2971800" cy="1463040"/>
+          </a:xfrm>
+          <a:prstGeom prst="rect">
+            <a:avLst/>
+          </a:prstGeom>
+          <a:noFill/>
+        </p:spPr>
+        <p:txBody>
+          <a:bodyPr wrap="square" lIns="0" rIns="0" tIns="0" bIns="0">
+            <a:spAutoFit/>
+          </a:bodyPr>
+          <a:lstStyle/>
+          <a:p>
+            <a:pPr algn="l"/>
+            <a:r>
+              <a:rPr sz="1200">
+                <a:solidFill>
+                  <a:srgbClr val="F4A81E"/>
+                </a:solidFill>
+                <a:latin typeface="JetBrains Mono"/>
+              </a:rPr>
+              <a:t>Fake relative URLs</a:t>
+            </a:r>
+          </a:p>
+          <a:p>
+            <a:pPr algn="l"/>
+            <a:r>
+              <a:rPr sz="1200">
+                <a:solidFill>
+                  <a:srgbClr val="4ADE80"/>
+                </a:solidFill>
+                <a:latin typeface="JetBrains Mono"/>
+              </a:rPr>
+              <a:t>73 payloads</a:t>
+            </a:r>
+          </a:p>
+          <a:p>
+            <a:pPr algn="l"/>
+            <a:r>
+              <a:rPr sz="1200">
+                <a:solidFill>
+                  <a:srgbClr val="CBE7FF"/>
+                </a:solidFill>
+                <a:latin typeface="JetBrains Mono"/>
+              </a:rPr>
+              <a:t/>
+            </a:r>
+          </a:p>
+          <a:p>
+            <a:pPr algn="l"/>
+            <a:r>
+              <a:rPr sz="1200">
+                <a:solidFill>
+                  <a:srgbClr val="9CA3AF"/>
+                </a:solidFill>
+                <a:latin typeface="JetBrains Mono"/>
+              </a:rPr>
+              <a:t>Tab/newline inside host,</a:t>
+            </a:r>
+          </a:p>
+          <a:p>
+            <a:pPr algn="l"/>
+            <a:r>
+              <a:rPr sz="1200">
+                <a:solidFill>
+                  <a:srgbClr val="9CA3AF"/>
+                </a:solidFill>
+                <a:latin typeface="JetBrains Mono"/>
+              </a:rPr>
+              <a:t>scheme-relative //, backslash</a:t>
+            </a:r>
+          </a:p>
+          <a:p>
+            <a:pPr algn="l"/>
+            <a:r>
+              <a:rPr sz="1200">
+                <a:solidFill>
+                  <a:srgbClr val="9CA3AF"/>
+                </a:solidFill>
+                <a:latin typeface="JetBrains Mono"/>
+              </a:rPr>
+              <a:t>as slash, protocol-relative</a:t>
+            </a:r>
+          </a:p>
+        </p:txBody>
+      </p:sp>
+      <p:sp>
+        <p:nvSpPr>
+          <p:cNvPr id="16" name="Rounded Rectangle 15"/>
+          <p:cNvSpPr/>
+          <p:nvPr/>
+        </p:nvSpPr>
+        <p:spPr>
+          <a:xfrm>
+            <a:off x="7909560" y="3840480"/>
+            <a:ext cx="3429000" cy="1828800"/>
+          </a:xfrm>
+          <a:prstGeom prst="roundRect">
+            <a:avLst/>
+          </a:prstGeom>
+          <a:solidFill>
+            <a:srgbClr val="1B1F27"/>
+          </a:solidFill>
+          <a:ln w="9525">
+            <a:solidFill>
+              <a:srgbClr val="30353E"/>
+            </a:solidFill>
+          </a:ln>
+          <a:effectLst/>
+        </p:spPr>
+        <p:style>
+          <a:lnRef idx="1">
+            <a:schemeClr val="accent1"/>
+          </a:lnRef>
+          <a:fillRef idx="3">
+            <a:schemeClr val="accent1"/>
+          </a:fillRef>
+          <a:effectRef idx="2">
+            <a:schemeClr val="accent1"/>
+          </a:effectRef>
+          <a:fontRef idx="minor">
+            <a:schemeClr val="lt1"/>
+          </a:fontRef>
+        </p:style>
+        <p:txBody>
+          <a:bodyPr rtlCol="0" anchor="ctr"/>
+          <a:lstStyle/>
+          <a:p>
+            <a:pPr algn="ctr"/>
+          </a:p>
+        </p:txBody>
+      </p:sp>
+      <p:sp>
+        <p:nvSpPr>
+          <p:cNvPr id="17" name="TextBox 16"/>
+          <p:cNvSpPr txBox="1"/>
+          <p:nvPr/>
+        </p:nvSpPr>
+        <p:spPr>
+          <a:xfrm>
+            <a:off x="8138160" y="4023360"/>
+            <a:ext cx="2971800" cy="1463040"/>
+          </a:xfrm>
+          <a:prstGeom prst="rect">
+            <a:avLst/>
+          </a:prstGeom>
+          <a:noFill/>
+        </p:spPr>
+        <p:txBody>
+          <a:bodyPr wrap="square" lIns="0" rIns="0" tIns="0" bIns="0">
+            <a:spAutoFit/>
+          </a:bodyPr>
+          <a:lstStyle/>
+          <a:p>
+            <a:pPr algn="l"/>
+            <a:r>
+              <a:rPr sz="1200">
+                <a:solidFill>
+                  <a:srgbClr val="F4A81E"/>
+                </a:solidFill>
+                <a:latin typeface="JetBrains Mono"/>
+              </a:rPr>
+              <a:t>Loopback</a:t>
+            </a:r>
+          </a:p>
+          <a:p>
+            <a:pPr algn="l"/>
+            <a:r>
+              <a:rPr sz="1200">
+                <a:solidFill>
+                  <a:srgbClr val="4ADE80"/>
+                </a:solidFill>
+                <a:latin typeface="JetBrains Mono"/>
+              </a:rPr>
+              <a:t>68 payloads</a:t>
+            </a:r>
+          </a:p>
+          <a:p>
+            <a:pPr algn="l"/>
+            <a:r>
+              <a:rPr sz="1200">
+                <a:solidFill>
+                  <a:srgbClr val="CBE7FF"/>
+                </a:solidFill>
+                <a:latin typeface="JetBrains Mono"/>
+              </a:rPr>
+              <a:t/>
+            </a:r>
+          </a:p>
+          <a:p>
+            <a:pPr algn="l"/>
+            <a:r>
+              <a:rPr sz="1200">
+                <a:solidFill>
+                  <a:srgbClr val="9CA3AF"/>
+                </a:solidFill>
+                <a:latin typeface="JetBrains Mono"/>
+              </a:rPr>
+              <a:t>127.0.0.1 in 20+ forms:</a:t>
+            </a:r>
+          </a:p>
+          <a:p>
+            <a:pPr algn="l"/>
+            <a:r>
+              <a:rPr sz="1200">
+                <a:solidFill>
+                  <a:srgbClr val="9CA3AF"/>
+                </a:solidFill>
+                <a:latin typeface="JetBrains Mono"/>
+              </a:rPr>
+              <a:t>hex, octal, decimal, IPv6,</a:t>
+            </a:r>
+          </a:p>
+          <a:p>
+            <a:pPr algn="l"/>
+            <a:r>
+              <a:rPr sz="1200">
+                <a:solidFill>
+                  <a:srgbClr val="9CA3AF"/>
+                </a:solidFill>
+                <a:latin typeface="JetBrains Mono"/>
+              </a:rPr>
+              <a:t>[::ffff:7f00:1], 0x7f000001</a:t>
+            </a:r>
+          </a:p>
+        </p:txBody>
+      </p:sp>
+      <p:sp>
+        <p:nvSpPr>
+          <p:cNvPr id="18" name="TextBox 17"/>
+          <p:cNvSpPr txBox="1"/>
+          <p:nvPr/>
+        </p:nvSpPr>
+        <p:spPr>
+          <a:xfrm>
+            <a:off x="685800" y="5806440"/>
+            <a:ext cx="10789920" cy="320040"/>
+          </a:xfrm>
+          <a:prstGeom prst="rect">
+            <a:avLst/>
+          </a:prstGeom>
+          <a:noFill/>
+        </p:spPr>
+        <p:txBody>
+          <a:bodyPr wrap="square" lIns="45720" rIns="45720" tIns="0" bIns="0">
+            <a:spAutoFit/>
+          </a:bodyPr>
+          <a:lstStyle/>
+          <a:p>
+            <a:pPr algn="l"/>
+            <a:r>
+              <a:rPr sz="1100" b="0">
+                <a:solidFill>
+                  <a:srgbClr val="9CA3AF"/>
+                </a:solidFill>
+                <a:latin typeface="Inter"/>
+              </a:rPr>
+              <a:t>IPv6 (3) — zone-ID attacks   +   Cloud metadata (17) — 169.254.169.254 in IPv6/hex/decimal   +   URL-splitting Unicode (51) — chars that break parsers</a:t>
+            </a:r>
+          </a:p>
+        </p:txBody>
+      </p:sp>
+      <p:sp>
+        <p:nvSpPr>
+          <p:cNvPr id="19" name="TextBox 18"/>
+          <p:cNvSpPr txBox="1"/>
+          <p:nvPr/>
+        </p:nvSpPr>
+        <p:spPr>
+          <a:xfrm>
+            <a:off x="685800" y="6172200"/>
+            <a:ext cx="10789920" cy="320040"/>
+          </a:xfrm>
+          <a:prstGeom prst="rect">
+            <a:avLst/>
+          </a:prstGeom>
+          <a:noFill/>
+        </p:spPr>
+        <p:txBody>
+          <a:bodyPr wrap="square" lIns="45720" rIns="45720" tIns="0" bIns="0">
+            <a:spAutoFit/>
+          </a:bodyPr>
+          <a:lstStyle/>
+          <a:p>
+            <a:pPr algn="l"/>
+            <a:r>
+              <a:rPr sz="1100" b="0">
+                <a:solidFill>
+                  <a:srgbClr val="9CA3AF"/>
+                </a:solidFill>
+                <a:latin typeface="Inter"/>
+              </a:rPr>
+              <a:t>We keep in sync with upstream via scripts/sync-url-cheatsheet.py. New community PRs land automatically.</a:t>
+            </a:r>
+          </a:p>
+        </p:txBody>
+      </p:sp>
+      <p:sp>
+        <p:nvSpPr>
+          <p:cNvPr id="20" name="Rectangle 19"/>
           <p:cNvSpPr/>
           <p:nvPr/>
         </p:nvSpPr>

--- a/docs/BypassFuzzer-Presentation.pptx
+++ b/docs/BypassFuzzer-Presentation.pptx
@@ -14,6 +14,7 @@
     <p:sldId id="262" r:id="rId13"/>
     <p:sldId id="263" r:id="rId14"/>
     <p:sldId id="264" r:id="rId15"/>
+    <p:sldId id="265" r:id="rId16"/>
   </p:sldIdLst>
   <p:sldSz cx="12191695" cy="6858000" type="screen4x3"/>
   <p:notesSz cx="6858000" cy="9144000"/>
@@ -3367,6 +3368,1075 @@
 </p:sld>
 </file>
 
+<file path=ppt/slides/slide10.xml><?xml version="1.0" encoding="utf-8"?>
+<p:sld xmlns:a="http://schemas.openxmlformats.org/drawingml/2006/main" xmlns:p="http://schemas.openxmlformats.org/presentationml/2006/main" xmlns:r="http://schemas.openxmlformats.org/officeDocument/2006/relationships">
+  <p:cSld>
+    <p:spTree>
+      <p:nvGrpSpPr>
+        <p:cNvPr id="1" name=""/>
+        <p:cNvGrpSpPr/>
+        <p:nvPr/>
+      </p:nvGrpSpPr>
+      <p:grpSpPr/>
+      <p:sp>
+        <p:nvSpPr>
+          <p:cNvPr id="2" name="Rectangle 1"/>
+          <p:cNvSpPr/>
+          <p:nvPr/>
+        </p:nvSpPr>
+        <p:spPr>
+          <a:xfrm>
+            <a:off x="0" y="0"/>
+            <a:ext cx="12191695" cy="6858000"/>
+          </a:xfrm>
+          <a:prstGeom prst="rect">
+            <a:avLst/>
+          </a:prstGeom>
+          <a:solidFill>
+            <a:srgbClr val="101218"/>
+          </a:solidFill>
+          <a:ln>
+            <a:noFill/>
+          </a:ln>
+          <a:effectLst/>
+        </p:spPr>
+        <p:style>
+          <a:lnRef idx="1">
+            <a:schemeClr val="accent1"/>
+          </a:lnRef>
+          <a:fillRef idx="3">
+            <a:schemeClr val="accent1"/>
+          </a:fillRef>
+          <a:effectRef idx="2">
+            <a:schemeClr val="accent1"/>
+          </a:effectRef>
+          <a:fontRef idx="minor">
+            <a:schemeClr val="lt1"/>
+          </a:fontRef>
+        </p:style>
+        <p:txBody>
+          <a:bodyPr rtlCol="0" anchor="ctr"/>
+          <a:lstStyle/>
+          <a:p>
+            <a:pPr algn="ctr"/>
+          </a:p>
+        </p:txBody>
+      </p:sp>
+      <p:sp>
+        <p:nvSpPr>
+          <p:cNvPr id="3" name="TextBox 2"/>
+          <p:cNvSpPr txBox="1"/>
+          <p:nvPr/>
+        </p:nvSpPr>
+        <p:spPr>
+          <a:xfrm>
+            <a:off x="685800" y="502920"/>
+            <a:ext cx="10789920" cy="640080"/>
+          </a:xfrm>
+          <a:prstGeom prst="rect">
+            <a:avLst/>
+          </a:prstGeom>
+          <a:noFill/>
+        </p:spPr>
+        <p:txBody>
+          <a:bodyPr wrap="square" lIns="45720" rIns="45720" tIns="0" bIns="0">
+            <a:spAutoFit/>
+          </a:bodyPr>
+          <a:lstStyle/>
+          <a:p>
+            <a:pPr algn="l"/>
+            <a:r>
+              <a:rPr sz="3600" b="1">
+                <a:solidFill>
+                  <a:srgbClr val="E5E7EB"/>
+                </a:solidFill>
+                <a:latin typeface="Inter"/>
+              </a:rPr>
+              <a:t>IDOR / BOLA tab.</a:t>
+            </a:r>
+          </a:p>
+        </p:txBody>
+      </p:sp>
+      <p:sp>
+        <p:nvSpPr>
+          <p:cNvPr id="4" name="TextBox 3"/>
+          <p:cNvSpPr txBox="1"/>
+          <p:nvPr/>
+        </p:nvSpPr>
+        <p:spPr>
+          <a:xfrm>
+            <a:off x="685800" y="1143000"/>
+            <a:ext cx="10789920" cy="457200"/>
+          </a:xfrm>
+          <a:prstGeom prst="rect">
+            <a:avLst/>
+          </a:prstGeom>
+          <a:noFill/>
+        </p:spPr>
+        <p:txBody>
+          <a:bodyPr wrap="square" lIns="45720" rIns="45720" tIns="0" bIns="0">
+            <a:spAutoFit/>
+          </a:bodyPr>
+          <a:lstStyle/>
+          <a:p>
+            <a:pPr algn="l"/>
+            <a:r>
+              <a:rPr sz="1600" b="0">
+                <a:solidFill>
+                  <a:srgbClr val="9CA3AF"/>
+                </a:solidFill>
+                <a:latin typeface="Inter"/>
+              </a:rPr>
+              <a:t>Third bug class. Tests object-level authorization — "can I access someone else's data by changing the identifier?"</a:t>
+            </a:r>
+          </a:p>
+        </p:txBody>
+      </p:sp>
+      <p:sp>
+        <p:nvSpPr>
+          <p:cNvPr id="5" name="TextBox 4"/>
+          <p:cNvSpPr txBox="1"/>
+          <p:nvPr/>
+        </p:nvSpPr>
+        <p:spPr>
+          <a:xfrm>
+            <a:off x="685800" y="1874519"/>
+            <a:ext cx="10789920" cy="365760"/>
+          </a:xfrm>
+          <a:prstGeom prst="rect">
+            <a:avLst/>
+          </a:prstGeom>
+          <a:noFill/>
+        </p:spPr>
+        <p:txBody>
+          <a:bodyPr wrap="square" lIns="45720" rIns="45720" tIns="0" bIns="0">
+            <a:spAutoFit/>
+          </a:bodyPr>
+          <a:lstStyle/>
+          <a:p>
+            <a:pPr algn="l"/>
+            <a:r>
+              <a:rPr sz="1500" b="1">
+                <a:solidFill>
+                  <a:srgbClr val="F4A81E"/>
+                </a:solidFill>
+                <a:latin typeface="Inter"/>
+              </a:rPr>
+              <a:t>How it works</a:t>
+            </a:r>
+          </a:p>
+        </p:txBody>
+      </p:sp>
+      <p:sp>
+        <p:nvSpPr>
+          <p:cNvPr id="6" name="Rounded Rectangle 5"/>
+          <p:cNvSpPr/>
+          <p:nvPr/>
+        </p:nvSpPr>
+        <p:spPr>
+          <a:xfrm>
+            <a:off x="685800" y="2240280"/>
+            <a:ext cx="10789920" cy="1645920"/>
+          </a:xfrm>
+          <a:prstGeom prst="roundRect">
+            <a:avLst/>
+          </a:prstGeom>
+          <a:solidFill>
+            <a:srgbClr val="1B1F27"/>
+          </a:solidFill>
+          <a:ln w="9525">
+            <a:solidFill>
+              <a:srgbClr val="30353E"/>
+            </a:solidFill>
+          </a:ln>
+          <a:effectLst/>
+        </p:spPr>
+        <p:style>
+          <a:lnRef idx="1">
+            <a:schemeClr val="accent1"/>
+          </a:lnRef>
+          <a:fillRef idx="3">
+            <a:schemeClr val="accent1"/>
+          </a:fillRef>
+          <a:effectRef idx="2">
+            <a:schemeClr val="accent1"/>
+          </a:effectRef>
+          <a:fontRef idx="minor">
+            <a:schemeClr val="lt1"/>
+          </a:fontRef>
+        </p:style>
+        <p:txBody>
+          <a:bodyPr rtlCol="0" anchor="ctr"/>
+          <a:lstStyle/>
+          <a:p>
+            <a:pPr algn="ctr"/>
+          </a:p>
+        </p:txBody>
+      </p:sp>
+      <p:sp>
+        <p:nvSpPr>
+          <p:cNvPr id="7" name="TextBox 6"/>
+          <p:cNvSpPr txBox="1"/>
+          <p:nvPr/>
+        </p:nvSpPr>
+        <p:spPr>
+          <a:xfrm>
+            <a:off x="914400" y="2423160"/>
+            <a:ext cx="10332720" cy="1280160"/>
+          </a:xfrm>
+          <a:prstGeom prst="rect">
+            <a:avLst/>
+          </a:prstGeom>
+          <a:noFill/>
+        </p:spPr>
+        <p:txBody>
+          <a:bodyPr wrap="square" lIns="0" rIns="0" tIns="0" bIns="0">
+            <a:spAutoFit/>
+          </a:bodyPr>
+          <a:lstStyle/>
+          <a:p>
+            <a:pPr algn="l"/>
+            <a:r>
+              <a:rPr sz="1400">
+                <a:solidFill>
+                  <a:srgbClr val="E5E7EB"/>
+                </a:solidFill>
+                <a:latin typeface="JetBrains Mono"/>
+              </a:rPr>
+              <a:t>1. You provide two identifiers: one you own, one you don't.</a:t>
+            </a:r>
+          </a:p>
+          <a:p>
+            <a:pPr algn="l"/>
+            <a:r>
+              <a:rPr sz="1400">
+                <a:solidFill>
+                  <a:srgbClr val="E5E7EB"/>
+                </a:solidFill>
+                <a:latin typeface="JetBrains Mono"/>
+              </a:rPr>
+              <a:t>2. Tool sends YOUR id as the control — shows the "normal" response.</a:t>
+            </a:r>
+          </a:p>
+          <a:p>
+            <a:pPr algn="l"/>
+            <a:r>
+              <a:rPr sz="1400">
+                <a:solidFill>
+                  <a:srgbClr val="E5E7EB"/>
+                </a:solidFill>
+                <a:latin typeface="JetBrains Mono"/>
+              </a:rPr>
+              <a:t>3. Tool swaps in the TARGET id — whatever it returns is your baseline.</a:t>
+            </a:r>
+          </a:p>
+          <a:p>
+            <a:pPr algn="l"/>
+            <a:r>
+              <a:rPr sz="1400">
+                <a:solidFill>
+                  <a:srgbClr val="E5E7EB"/>
+                </a:solidFill>
+                <a:latin typeface="JetBrains Mono"/>
+              </a:rPr>
+              <a:t>4. Tool runs 29 playbooks mutating around the target id.</a:t>
+            </a:r>
+          </a:p>
+          <a:p>
+            <a:pPr algn="l"/>
+            <a:r>
+              <a:rPr sz="1400">
+                <a:solidFill>
+                  <a:srgbClr val="E5E7EB"/>
+                </a:solidFill>
+                <a:latin typeface="JetBrains Mono"/>
+              </a:rPr>
+              <a:t>5. You scan the results for any response that differs from baseline.</a:t>
+            </a:r>
+          </a:p>
+          <a:p>
+            <a:pPr algn="l"/>
+            <a:r>
+              <a:rPr sz="1400">
+                <a:solidFill>
+                  <a:srgbClr val="F4A81E"/>
+                </a:solidFill>
+                <a:latin typeface="JetBrains Mono"/>
+              </a:rPr>
+              <a:t>   The tool generates + fires. You are the comparator.</a:t>
+            </a:r>
+          </a:p>
+        </p:txBody>
+      </p:sp>
+      <p:sp>
+        <p:nvSpPr>
+          <p:cNvPr id="8" name="TextBox 7"/>
+          <p:cNvSpPr txBox="1"/>
+          <p:nvPr/>
+        </p:nvSpPr>
+        <p:spPr>
+          <a:xfrm>
+            <a:off x="685800" y="4069080"/>
+            <a:ext cx="10789920" cy="365760"/>
+          </a:xfrm>
+          <a:prstGeom prst="rect">
+            <a:avLst/>
+          </a:prstGeom>
+          <a:noFill/>
+        </p:spPr>
+        <p:txBody>
+          <a:bodyPr wrap="square" lIns="45720" rIns="45720" tIns="0" bIns="0">
+            <a:spAutoFit/>
+          </a:bodyPr>
+          <a:lstStyle/>
+          <a:p>
+            <a:pPr algn="l"/>
+            <a:r>
+              <a:rPr sz="1500" b="1">
+                <a:solidFill>
+                  <a:srgbClr val="F4A81E"/>
+                </a:solidFill>
+                <a:latin typeface="Inter"/>
+              </a:rPr>
+              <a:t>29 playbooks across 5 namespaces:</a:t>
+            </a:r>
+          </a:p>
+        </p:txBody>
+      </p:sp>
+      <p:sp>
+        <p:nvSpPr>
+          <p:cNvPr id="9" name="Rounded Rectangle 8"/>
+          <p:cNvSpPr/>
+          <p:nvPr/>
+        </p:nvSpPr>
+        <p:spPr>
+          <a:xfrm>
+            <a:off x="685800" y="4434840"/>
+            <a:ext cx="2103120" cy="1691640"/>
+          </a:xfrm>
+          <a:prstGeom prst="roundRect">
+            <a:avLst/>
+          </a:prstGeom>
+          <a:solidFill>
+            <a:srgbClr val="1B1F27"/>
+          </a:solidFill>
+          <a:ln w="9525">
+            <a:solidFill>
+              <a:srgbClr val="30353E"/>
+            </a:solidFill>
+          </a:ln>
+          <a:effectLst/>
+        </p:spPr>
+        <p:style>
+          <a:lnRef idx="1">
+            <a:schemeClr val="accent1"/>
+          </a:lnRef>
+          <a:fillRef idx="3">
+            <a:schemeClr val="accent1"/>
+          </a:fillRef>
+          <a:effectRef idx="2">
+            <a:schemeClr val="accent1"/>
+          </a:effectRef>
+          <a:fontRef idx="minor">
+            <a:schemeClr val="lt1"/>
+          </a:fontRef>
+        </p:style>
+        <p:txBody>
+          <a:bodyPr rtlCol="0" anchor="ctr"/>
+          <a:lstStyle/>
+          <a:p>
+            <a:pPr algn="ctr"/>
+          </a:p>
+        </p:txBody>
+      </p:sp>
+      <p:sp>
+        <p:nvSpPr>
+          <p:cNvPr id="10" name="TextBox 9"/>
+          <p:cNvSpPr txBox="1"/>
+          <p:nvPr/>
+        </p:nvSpPr>
+        <p:spPr>
+          <a:xfrm>
+            <a:off x="914400" y="4617720"/>
+            <a:ext cx="1645920" cy="1325880"/>
+          </a:xfrm>
+          <a:prstGeom prst="rect">
+            <a:avLst/>
+          </a:prstGeom>
+          <a:noFill/>
+        </p:spPr>
+        <p:txBody>
+          <a:bodyPr wrap="square" lIns="0" rIns="0" tIns="0" bIns="0">
+            <a:spAutoFit/>
+          </a:bodyPr>
+          <a:lstStyle/>
+          <a:p>
+            <a:pPr algn="l"/>
+            <a:r>
+              <a:rPr sz="1100">
+                <a:solidFill>
+                  <a:srgbClr val="F4A81E"/>
+                </a:solidFill>
+                <a:latin typeface="JetBrains Mono"/>
+              </a:rPr>
+              <a:t>idor.path.*</a:t>
+            </a:r>
+          </a:p>
+          <a:p>
+            <a:pPr algn="l"/>
+            <a:r>
+              <a:rPr sz="1100">
+                <a:solidFill>
+                  <a:srgbClr val="4ADE80"/>
+                </a:solidFill>
+                <a:latin typeface="JetBrains Mono"/>
+              </a:rPr>
+              <a:t>4 playbooks</a:t>
+            </a:r>
+          </a:p>
+          <a:p>
+            <a:pPr algn="l"/>
+            <a:r>
+              <a:rPr sz="1100">
+                <a:solidFill>
+                  <a:srgbClr val="CBE7FF"/>
+                </a:solidFill>
+                <a:latin typeface="JetBrains Mono"/>
+              </a:rPr>
+              <a:t/>
+            </a:r>
+          </a:p>
+          <a:p>
+            <a:pPr algn="l"/>
+            <a:r>
+              <a:rPr sz="1100">
+                <a:solidFill>
+                  <a:srgbClr val="9CA3AF"/>
+                </a:solidFill>
+                <a:latin typeface="JetBrains Mono"/>
+              </a:rPr>
+              <a:t>Suffix formats</a:t>
+            </a:r>
+          </a:p>
+          <a:p>
+            <a:pPr algn="l"/>
+            <a:r>
+              <a:rPr sz="1100">
+                <a:solidFill>
+                  <a:srgbClr val="9CA3AF"/>
+                </a:solidFill>
+                <a:latin typeface="JetBrains Mono"/>
+              </a:rPr>
+              <a:t>Trailing slash</a:t>
+            </a:r>
+          </a:p>
+          <a:p>
+            <a:pPr algn="l"/>
+            <a:r>
+              <a:rPr sz="1100">
+                <a:solidFill>
+                  <a:srgbClr val="9CA3AF"/>
+                </a:solidFill>
+                <a:latin typeface="JetBrains Mono"/>
+              </a:rPr>
+              <a:t>Special ID values</a:t>
+            </a:r>
+          </a:p>
+          <a:p>
+            <a:pPr algn="l"/>
+            <a:r>
+              <a:rPr sz="1100">
+                <a:solidFill>
+                  <a:srgbClr val="9CA3AF"/>
+                </a:solidFill>
+                <a:latin typeface="JetBrains Mono"/>
+              </a:rPr>
+              <a:t>Dot-segment traversal</a:t>
+            </a:r>
+          </a:p>
+        </p:txBody>
+      </p:sp>
+      <p:sp>
+        <p:nvSpPr>
+          <p:cNvPr id="11" name="Rounded Rectangle 10"/>
+          <p:cNvSpPr/>
+          <p:nvPr/>
+        </p:nvSpPr>
+        <p:spPr>
+          <a:xfrm>
+            <a:off x="2926080" y="4434840"/>
+            <a:ext cx="2103120" cy="1691640"/>
+          </a:xfrm>
+          <a:prstGeom prst="roundRect">
+            <a:avLst/>
+          </a:prstGeom>
+          <a:solidFill>
+            <a:srgbClr val="1B1F27"/>
+          </a:solidFill>
+          <a:ln w="9525">
+            <a:solidFill>
+              <a:srgbClr val="30353E"/>
+            </a:solidFill>
+          </a:ln>
+          <a:effectLst/>
+        </p:spPr>
+        <p:style>
+          <a:lnRef idx="1">
+            <a:schemeClr val="accent1"/>
+          </a:lnRef>
+          <a:fillRef idx="3">
+            <a:schemeClr val="accent1"/>
+          </a:fillRef>
+          <a:effectRef idx="2">
+            <a:schemeClr val="accent1"/>
+          </a:effectRef>
+          <a:fontRef idx="minor">
+            <a:schemeClr val="lt1"/>
+          </a:fontRef>
+        </p:style>
+        <p:txBody>
+          <a:bodyPr rtlCol="0" anchor="ctr"/>
+          <a:lstStyle/>
+          <a:p>
+            <a:pPr algn="ctr"/>
+          </a:p>
+        </p:txBody>
+      </p:sp>
+      <p:sp>
+        <p:nvSpPr>
+          <p:cNvPr id="12" name="TextBox 11"/>
+          <p:cNvSpPr txBox="1"/>
+          <p:nvPr/>
+        </p:nvSpPr>
+        <p:spPr>
+          <a:xfrm>
+            <a:off x="3154680" y="4617720"/>
+            <a:ext cx="1645920" cy="1325880"/>
+          </a:xfrm>
+          <a:prstGeom prst="rect">
+            <a:avLst/>
+          </a:prstGeom>
+          <a:noFill/>
+        </p:spPr>
+        <p:txBody>
+          <a:bodyPr wrap="square" lIns="0" rIns="0" tIns="0" bIns="0">
+            <a:spAutoFit/>
+          </a:bodyPr>
+          <a:lstStyle/>
+          <a:p>
+            <a:pPr algn="l"/>
+            <a:r>
+              <a:rPr sz="1100">
+                <a:solidFill>
+                  <a:srgbClr val="F4A81E"/>
+                </a:solidFill>
+                <a:latin typeface="JetBrains Mono"/>
+              </a:rPr>
+              <a:t>idor.query.*</a:t>
+            </a:r>
+          </a:p>
+          <a:p>
+            <a:pPr algn="l"/>
+            <a:r>
+              <a:rPr sz="1100">
+                <a:solidFill>
+                  <a:srgbClr val="4ADE80"/>
+                </a:solidFill>
+                <a:latin typeface="JetBrains Mono"/>
+              </a:rPr>
+              <a:t>5 playbooks</a:t>
+            </a:r>
+          </a:p>
+          <a:p>
+            <a:pPr algn="l"/>
+            <a:r>
+              <a:rPr sz="1100">
+                <a:solidFill>
+                  <a:srgbClr val="CBE7FF"/>
+                </a:solidFill>
+                <a:latin typeface="JetBrains Mono"/>
+              </a:rPr>
+              <a:t/>
+            </a:r>
+          </a:p>
+          <a:p>
+            <a:pPr algn="l"/>
+            <a:r>
+              <a:rPr sz="1100">
+                <a:solidFill>
+                  <a:srgbClr val="9CA3AF"/>
+                </a:solidFill>
+                <a:latin typeface="JetBrains Mono"/>
+              </a:rPr>
+              <a:t>Conflicting identifiers</a:t>
+            </a:r>
+          </a:p>
+          <a:p>
+            <a:pPr algn="l"/>
+            <a:r>
+              <a:rPr sz="1100">
+                <a:solidFill>
+                  <a:srgbClr val="9CA3AF"/>
+                </a:solidFill>
+                <a:latin typeface="JetBrains Mono"/>
+              </a:rPr>
+              <a:t>Parameter pollution</a:t>
+            </a:r>
+          </a:p>
+          <a:p>
+            <a:pPr algn="l"/>
+            <a:r>
+              <a:rPr sz="1100">
+                <a:solidFill>
+                  <a:srgbClr val="9CA3AF"/>
+                </a:solidFill>
+                <a:latin typeface="JetBrains Mono"/>
+              </a:rPr>
+              <a:t>JSON wrap / aliases</a:t>
+            </a:r>
+          </a:p>
+          <a:p>
+            <a:pPr algn="l"/>
+            <a:r>
+              <a:rPr sz="1100">
+                <a:solidFill>
+                  <a:srgbClr val="9CA3AF"/>
+                </a:solidFill>
+                <a:latin typeface="JetBrains Mono"/>
+              </a:rPr>
+              <a:t>Numeric pivots</a:t>
+            </a:r>
+          </a:p>
+        </p:txBody>
+      </p:sp>
+      <p:sp>
+        <p:nvSpPr>
+          <p:cNvPr id="13" name="Rounded Rectangle 12"/>
+          <p:cNvSpPr/>
+          <p:nvPr/>
+        </p:nvSpPr>
+        <p:spPr>
+          <a:xfrm>
+            <a:off x="5166360" y="4434840"/>
+            <a:ext cx="2103120" cy="1691640"/>
+          </a:xfrm>
+          <a:prstGeom prst="roundRect">
+            <a:avLst/>
+          </a:prstGeom>
+          <a:solidFill>
+            <a:srgbClr val="1B1F27"/>
+          </a:solidFill>
+          <a:ln w="9525">
+            <a:solidFill>
+              <a:srgbClr val="30353E"/>
+            </a:solidFill>
+          </a:ln>
+          <a:effectLst/>
+        </p:spPr>
+        <p:style>
+          <a:lnRef idx="1">
+            <a:schemeClr val="accent1"/>
+          </a:lnRef>
+          <a:fillRef idx="3">
+            <a:schemeClr val="accent1"/>
+          </a:fillRef>
+          <a:effectRef idx="2">
+            <a:schemeClr val="accent1"/>
+          </a:effectRef>
+          <a:fontRef idx="minor">
+            <a:schemeClr val="lt1"/>
+          </a:fontRef>
+        </p:style>
+        <p:txBody>
+          <a:bodyPr rtlCol="0" anchor="ctr"/>
+          <a:lstStyle/>
+          <a:p>
+            <a:pPr algn="ctr"/>
+          </a:p>
+        </p:txBody>
+      </p:sp>
+      <p:sp>
+        <p:nvSpPr>
+          <p:cNvPr id="14" name="TextBox 13"/>
+          <p:cNvSpPr txBox="1"/>
+          <p:nvPr/>
+        </p:nvSpPr>
+        <p:spPr>
+          <a:xfrm>
+            <a:off x="5394960" y="4617720"/>
+            <a:ext cx="1645920" cy="1325880"/>
+          </a:xfrm>
+          <a:prstGeom prst="rect">
+            <a:avLst/>
+          </a:prstGeom>
+          <a:noFill/>
+        </p:spPr>
+        <p:txBody>
+          <a:bodyPr wrap="square" lIns="0" rIns="0" tIns="0" bIns="0">
+            <a:spAutoFit/>
+          </a:bodyPr>
+          <a:lstStyle/>
+          <a:p>
+            <a:pPr algn="l"/>
+            <a:r>
+              <a:rPr sz="1100">
+                <a:solidFill>
+                  <a:srgbClr val="F4A81E"/>
+                </a:solidFill>
+                <a:latin typeface="JetBrains Mono"/>
+              </a:rPr>
+              <a:t>idor.body.*</a:t>
+            </a:r>
+          </a:p>
+          <a:p>
+            <a:pPr algn="l"/>
+            <a:r>
+              <a:rPr sz="1100">
+                <a:solidFill>
+                  <a:srgbClr val="4ADE80"/>
+                </a:solidFill>
+                <a:latin typeface="JetBrains Mono"/>
+              </a:rPr>
+              <a:t>6 playbooks</a:t>
+            </a:r>
+          </a:p>
+          <a:p>
+            <a:pPr algn="l"/>
+            <a:r>
+              <a:rPr sz="1100">
+                <a:solidFill>
+                  <a:srgbClr val="CBE7FF"/>
+                </a:solidFill>
+                <a:latin typeface="JetBrains Mono"/>
+              </a:rPr>
+              <a:t/>
+            </a:r>
+          </a:p>
+          <a:p>
+            <a:pPr algn="l"/>
+            <a:r>
+              <a:rPr sz="1100">
+                <a:solidFill>
+                  <a:srgbClr val="9CA3AF"/>
+                </a:solidFill>
+                <a:latin typeface="JetBrains Mono"/>
+              </a:rPr>
+              <a:t>Content-type tampering</a:t>
+            </a:r>
+          </a:p>
+          <a:p>
+            <a:pPr algn="l"/>
+            <a:r>
+              <a:rPr sz="1100">
+                <a:solidFill>
+                  <a:srgbClr val="9CA3AF"/>
+                </a:solidFill>
+                <a:latin typeface="JetBrains Mono"/>
+              </a:rPr>
+              <a:t>JSON batch / wrap / dupes</a:t>
+            </a:r>
+          </a:p>
+          <a:p>
+            <a:pPr algn="l"/>
+            <a:r>
+              <a:rPr sz="1100">
+                <a:solidFill>
+                  <a:srgbClr val="9CA3AF"/>
+                </a:solidFill>
+                <a:latin typeface="JetBrains Mono"/>
+              </a:rPr>
+              <a:t>Wildcards</a:t>
+            </a:r>
+          </a:p>
+          <a:p>
+            <a:pPr algn="l"/>
+            <a:r>
+              <a:rPr sz="1100">
+                <a:solidFill>
+                  <a:srgbClr val="9CA3AF"/>
+                </a:solidFill>
+                <a:latin typeface="JetBrains Mono"/>
+              </a:rPr>
+              <a:t>Unexpected data types</a:t>
+            </a:r>
+          </a:p>
+        </p:txBody>
+      </p:sp>
+      <p:sp>
+        <p:nvSpPr>
+          <p:cNvPr id="15" name="Rounded Rectangle 14"/>
+          <p:cNvSpPr/>
+          <p:nvPr/>
+        </p:nvSpPr>
+        <p:spPr>
+          <a:xfrm>
+            <a:off x="7406640" y="4434840"/>
+            <a:ext cx="2103120" cy="1691640"/>
+          </a:xfrm>
+          <a:prstGeom prst="roundRect">
+            <a:avLst/>
+          </a:prstGeom>
+          <a:solidFill>
+            <a:srgbClr val="1B1F27"/>
+          </a:solidFill>
+          <a:ln w="9525">
+            <a:solidFill>
+              <a:srgbClr val="30353E"/>
+            </a:solidFill>
+          </a:ln>
+          <a:effectLst/>
+        </p:spPr>
+        <p:style>
+          <a:lnRef idx="1">
+            <a:schemeClr val="accent1"/>
+          </a:lnRef>
+          <a:fillRef idx="3">
+            <a:schemeClr val="accent1"/>
+          </a:fillRef>
+          <a:effectRef idx="2">
+            <a:schemeClr val="accent1"/>
+          </a:effectRef>
+          <a:fontRef idx="minor">
+            <a:schemeClr val="lt1"/>
+          </a:fontRef>
+        </p:style>
+        <p:txBody>
+          <a:bodyPr rtlCol="0" anchor="ctr"/>
+          <a:lstStyle/>
+          <a:p>
+            <a:pPr algn="ctr"/>
+          </a:p>
+        </p:txBody>
+      </p:sp>
+      <p:sp>
+        <p:nvSpPr>
+          <p:cNvPr id="16" name="TextBox 15"/>
+          <p:cNvSpPr txBox="1"/>
+          <p:nvPr/>
+        </p:nvSpPr>
+        <p:spPr>
+          <a:xfrm>
+            <a:off x="7635240" y="4617720"/>
+            <a:ext cx="1645920" cy="1325880"/>
+          </a:xfrm>
+          <a:prstGeom prst="rect">
+            <a:avLst/>
+          </a:prstGeom>
+          <a:noFill/>
+        </p:spPr>
+        <p:txBody>
+          <a:bodyPr wrap="square" lIns="0" rIns="0" tIns="0" bIns="0">
+            <a:spAutoFit/>
+          </a:bodyPr>
+          <a:lstStyle/>
+          <a:p>
+            <a:pPr algn="l"/>
+            <a:r>
+              <a:rPr sz="1100">
+                <a:solidFill>
+                  <a:srgbClr val="F4A81E"/>
+                </a:solidFill>
+                <a:latin typeface="JetBrains Mono"/>
+              </a:rPr>
+              <a:t>idor.hybrid.*</a:t>
+            </a:r>
+          </a:p>
+          <a:p>
+            <a:pPr algn="l"/>
+            <a:r>
+              <a:rPr sz="1100">
+                <a:solidFill>
+                  <a:srgbClr val="4ADE80"/>
+                </a:solidFill>
+                <a:latin typeface="JetBrains Mono"/>
+              </a:rPr>
+              <a:t>10 playbooks</a:t>
+            </a:r>
+          </a:p>
+          <a:p>
+            <a:pPr algn="l"/>
+            <a:r>
+              <a:rPr sz="1100">
+                <a:solidFill>
+                  <a:srgbClr val="CBE7FF"/>
+                </a:solidFill>
+                <a:latin typeface="JetBrains Mono"/>
+              </a:rPr>
+              <a:t/>
+            </a:r>
+          </a:p>
+          <a:p>
+            <a:pPr algn="l"/>
+            <a:r>
+              <a:rPr sz="1100">
+                <a:solidFill>
+                  <a:srgbClr val="9CA3AF"/>
+                </a:solidFill>
+                <a:latin typeface="JetBrains Mono"/>
+              </a:rPr>
+              <a:t>Cross-source conflicts</a:t>
+            </a:r>
+          </a:p>
+          <a:p>
+            <a:pPr algn="l"/>
+            <a:r>
+              <a:rPr sz="1100">
+                <a:solidFill>
+                  <a:srgbClr val="9CA3AF"/>
+                </a:solidFill>
+                <a:latin typeface="JetBrains Mono"/>
+              </a:rPr>
+              <a:t>Case / encoding variants</a:t>
+            </a:r>
+          </a:p>
+          <a:p>
+            <a:pPr algn="l"/>
+            <a:r>
+              <a:rPr sz="1100">
+                <a:solidFill>
+                  <a:srgbClr val="9CA3AF"/>
+                </a:solidFill>
+                <a:latin typeface="JetBrains Mono"/>
+              </a:rPr>
+              <a:t>UUID neighbor edits</a:t>
+            </a:r>
+          </a:p>
+          <a:p>
+            <a:pPr algn="l"/>
+            <a:r>
+              <a:rPr sz="1100">
+                <a:solidFill>
+                  <a:srgbClr val="9CA3AF"/>
+                </a:solidFill>
+                <a:latin typeface="JetBrains Mono"/>
+              </a:rPr>
+              <a:t>Method override</a:t>
+            </a:r>
+          </a:p>
+        </p:txBody>
+      </p:sp>
+      <p:sp>
+        <p:nvSpPr>
+          <p:cNvPr id="17" name="TextBox 16"/>
+          <p:cNvSpPr txBox="1"/>
+          <p:nvPr/>
+        </p:nvSpPr>
+        <p:spPr>
+          <a:xfrm>
+            <a:off x="9646920" y="4434840"/>
+            <a:ext cx="2103120" cy="365760"/>
+          </a:xfrm>
+          <a:prstGeom prst="rect">
+            <a:avLst/>
+          </a:prstGeom>
+          <a:noFill/>
+        </p:spPr>
+        <p:txBody>
+          <a:bodyPr wrap="square" lIns="45720" rIns="45720" tIns="0" bIns="0">
+            <a:spAutoFit/>
+          </a:bodyPr>
+          <a:lstStyle/>
+          <a:p>
+            <a:pPr algn="l"/>
+            <a:r>
+              <a:rPr sz="1100" b="0">
+                <a:solidFill>
+                  <a:srgbClr val="9CA3AF"/>
+                </a:solidFill>
+                <a:latin typeface="Inter"/>
+              </a:rPr>
+              <a:t>+ 4 more in idor.header.*</a:t>
+            </a:r>
+          </a:p>
+        </p:txBody>
+      </p:sp>
+      <p:sp>
+        <p:nvSpPr>
+          <p:cNvPr id="18" name="TextBox 17"/>
+          <p:cNvSpPr txBox="1"/>
+          <p:nvPr/>
+        </p:nvSpPr>
+        <p:spPr>
+          <a:xfrm>
+            <a:off x="685800" y="6263640"/>
+            <a:ext cx="10789920" cy="320040"/>
+          </a:xfrm>
+          <a:prstGeom prst="rect">
+            <a:avLst/>
+          </a:prstGeom>
+          <a:noFill/>
+        </p:spPr>
+        <p:txBody>
+          <a:bodyPr wrap="square" lIns="45720" rIns="45720" tIns="0" bIns="0">
+            <a:spAutoFit/>
+          </a:bodyPr>
+          <a:lstStyle/>
+          <a:p>
+            <a:pPr algn="l"/>
+            <a:r>
+              <a:rPr sz="1200" b="1">
+                <a:solidFill>
+                  <a:srgbClr val="9CA3AF"/>
+                </a:solidFill>
+                <a:latin typeface="Inter"/>
+              </a:rPr>
+              <a:t>Context-aware: if the identifier lives in the path, path playbooks fire. If it's in a JSON body, body playbooks fire. Same for query string.</a:t>
+            </a:r>
+          </a:p>
+        </p:txBody>
+      </p:sp>
+      <p:sp>
+        <p:nvSpPr>
+          <p:cNvPr id="19" name="Rectangle 18"/>
+          <p:cNvSpPr/>
+          <p:nvPr/>
+        </p:nvSpPr>
+        <p:spPr>
+          <a:xfrm>
+            <a:off x="457200" y="6263640"/>
+            <a:ext cx="365760" cy="36576"/>
+          </a:xfrm>
+          <a:prstGeom prst="rect">
+            <a:avLst/>
+          </a:prstGeom>
+          <a:solidFill>
+            <a:srgbClr val="F4A81E"/>
+          </a:solidFill>
+          <a:ln>
+            <a:noFill/>
+          </a:ln>
+          <a:effectLst/>
+        </p:spPr>
+        <p:style>
+          <a:lnRef idx="1">
+            <a:schemeClr val="accent1"/>
+          </a:lnRef>
+          <a:fillRef idx="3">
+            <a:schemeClr val="accent1"/>
+          </a:fillRef>
+          <a:effectRef idx="2">
+            <a:schemeClr val="accent1"/>
+          </a:effectRef>
+          <a:fontRef idx="minor">
+            <a:schemeClr val="lt1"/>
+          </a:fontRef>
+        </p:style>
+        <p:txBody>
+          <a:bodyPr rtlCol="0" anchor="ctr"/>
+          <a:lstStyle/>
+          <a:p>
+            <a:pPr algn="ctr"/>
+          </a:p>
+        </p:txBody>
+      </p:sp>
+    </p:spTree>
+  </p:cSld>
+  <p:clrMapOvr>
+    <a:masterClrMapping/>
+  </p:clrMapOvr>
+</p:sld>
+</file>
+
 <file path=ppt/slides/slide2.xml><?xml version="1.0" encoding="utf-8"?>
 <p:sld xmlns:a="http://schemas.openxmlformats.org/drawingml/2006/main" xmlns:p="http://schemas.openxmlformats.org/presentationml/2006/main" xmlns:r="http://schemas.openxmlformats.org/officeDocument/2006/relationships">
   <p:cSld>
@@ -8062,7 +9132,7 @@
                 </a:solidFill>
                 <a:latin typeface="Inter"/>
               </a:rPr>
-              <a:t>portswigger.net/web-security/ssrf/url-validation-bypass-cheat-sheet</a:t>
+              <a:t>https://portswigger.net/web-security/ssrf/url-validation-bypass-cheat-sheet</a:t>
             </a:r>
           </a:p>
         </p:txBody>
@@ -8097,7 +9167,7 @@
                 </a:solidFill>
                 <a:latin typeface="JetBrains Mono"/>
               </a:rPr>
-              <a:t>github.com/PortSwigger/url-cheatsheet-data  ·  6 categories  ·  open to community PRs</a:t>
+              <a:t>https://github.com/PortSwigger/url-cheatsheet-data  ·  6 categories  ·  open to community PRs</a:t>
             </a:r>
           </a:p>
         </p:txBody>
